--- a/docs/submission/Assay-AI-Builder-Cup.pptx
+++ b/docs/submission/Assay-AI-Builder-Cup.pptx
@@ -7381,7 +7381,7 @@
                 </a:solidFill>
                 <a:latin typeface="Google Sans Flex"/>
               </a:rPr>
-              <a:t>Assay</a:t>
+              <a:t>Nexatriv</a:t>
             </a:r>
           </a:p>
         </p:txBody>
@@ -7907,7 +7907,53 @@
       </p:sp>
       <p:sp>
         <p:nvSpPr>
-          <p:cNvPr id="186" name="TextBox 185"/>
+          <p:cNvPr id="214" name="Rounded Rectangle 213"/>
+          <p:cNvSpPr/>
+          <p:nvPr/>
+        </p:nvSpPr>
+        <p:spPr>
+          <a:xfrm>
+            <a:off x="384048" y="3794760"/>
+            <a:ext cx="8275320" cy="301752"/>
+          </a:xfrm>
+          <a:prstGeom prst="roundRect">
+            <a:avLst>
+              <a:gd name="adj" fmla="val 4000"/>
+            </a:avLst>
+          </a:prstGeom>
+          <a:solidFill>
+            <a:srgbClr val="EEF0FF"/>
+          </a:solidFill>
+          <a:ln>
+            <a:noFill/>
+          </a:ln>
+          <a:effectLst/>
+        </p:spPr>
+        <p:style>
+          <a:lnRef idx="1">
+            <a:schemeClr val="accent1"/>
+          </a:lnRef>
+          <a:fillRef idx="3">
+            <a:schemeClr val="accent1"/>
+          </a:fillRef>
+          <a:effectRef idx="2">
+            <a:schemeClr val="accent1"/>
+          </a:effectRef>
+          <a:fontRef idx="minor">
+            <a:schemeClr val="lt1"/>
+          </a:fontRef>
+        </p:style>
+        <p:txBody>
+          <a:bodyPr rtlCol="0" anchor="ctr"/>
+          <a:lstStyle/>
+          <a:p>
+            <a:pPr algn="ctr"/>
+          </a:p>
+        </p:txBody>
+      </p:sp>
+      <p:sp>
+        <p:nvSpPr>
+          <p:cNvPr id="215" name="TextBox 214"/>
           <p:cNvSpPr txBox="1"/>
           <p:nvPr/>
         </p:nvSpPr>
@@ -7949,7 +7995,7 @@
       </p:sp>
       <p:sp>
         <p:nvSpPr>
-          <p:cNvPr id="187" name="TextBox 186"/>
+          <p:cNvPr id="216" name="TextBox 215"/>
           <p:cNvSpPr txBox="1"/>
           <p:nvPr/>
         </p:nvSpPr>
@@ -7991,7 +8037,7 @@
       </p:sp>
       <p:sp>
         <p:nvSpPr>
-          <p:cNvPr id="188" name="TextBox 187"/>
+          <p:cNvPr id="217" name="TextBox 216"/>
           <p:cNvSpPr txBox="1"/>
           <p:nvPr/>
         </p:nvSpPr>
@@ -8033,7 +8079,7 @@
       </p:sp>
       <p:sp>
         <p:nvSpPr>
-          <p:cNvPr id="189" name="TextBox 188"/>
+          <p:cNvPr id="218" name="TextBox 217"/>
           <p:cNvSpPr txBox="1"/>
           <p:nvPr/>
         </p:nvSpPr>
@@ -8075,7 +8121,7 @@
       </p:sp>
       <p:sp>
         <p:nvSpPr>
-          <p:cNvPr id="190" name="TextBox 189"/>
+          <p:cNvPr id="219" name="TextBox 218"/>
           <p:cNvSpPr txBox="1"/>
           <p:nvPr/>
         </p:nvSpPr>
@@ -8117,7 +8163,7 @@
       </p:sp>
       <p:sp>
         <p:nvSpPr>
-          <p:cNvPr id="191" name="TextBox 190"/>
+          <p:cNvPr id="220" name="TextBox 219"/>
           <p:cNvSpPr txBox="1"/>
           <p:nvPr/>
         </p:nvSpPr>
@@ -8159,7 +8205,7 @@
       </p:sp>
       <p:sp>
         <p:nvSpPr>
-          <p:cNvPr id="192" name="TextBox 191"/>
+          <p:cNvPr id="221" name="TextBox 220"/>
           <p:cNvSpPr txBox="1"/>
           <p:nvPr/>
         </p:nvSpPr>
@@ -8201,7 +8247,7 @@
       </p:sp>
       <p:sp>
         <p:nvSpPr>
-          <p:cNvPr id="193" name="TextBox 192"/>
+          <p:cNvPr id="222" name="TextBox 221"/>
           <p:cNvSpPr txBox="1"/>
           <p:nvPr/>
         </p:nvSpPr>
@@ -8243,7 +8289,7 @@
       </p:sp>
       <p:sp>
         <p:nvSpPr>
-          <p:cNvPr id="194" name="TextBox 193"/>
+          <p:cNvPr id="223" name="TextBox 222"/>
           <p:cNvSpPr txBox="1"/>
           <p:nvPr/>
         </p:nvSpPr>
@@ -8285,7 +8331,7 @@
       </p:sp>
       <p:sp>
         <p:nvSpPr>
-          <p:cNvPr id="195" name="TextBox 194"/>
+          <p:cNvPr id="224" name="TextBox 223"/>
           <p:cNvSpPr txBox="1"/>
           <p:nvPr/>
         </p:nvSpPr>
@@ -8327,7 +8373,7 @@
       </p:sp>
       <p:sp>
         <p:nvSpPr>
-          <p:cNvPr id="196" name="TextBox 195"/>
+          <p:cNvPr id="225" name="TextBox 224"/>
           <p:cNvSpPr txBox="1"/>
           <p:nvPr/>
         </p:nvSpPr>
@@ -8369,7 +8415,7 @@
       </p:sp>
       <p:sp>
         <p:nvSpPr>
-          <p:cNvPr id="197" name="TextBox 196"/>
+          <p:cNvPr id="226" name="TextBox 225"/>
           <p:cNvSpPr txBox="1"/>
           <p:nvPr/>
         </p:nvSpPr>
@@ -8411,7 +8457,7 @@
       </p:sp>
       <p:sp>
         <p:nvSpPr>
-          <p:cNvPr id="198" name="TextBox 197"/>
+          <p:cNvPr id="227" name="TextBox 226"/>
           <p:cNvSpPr txBox="1"/>
           <p:nvPr/>
         </p:nvSpPr>
@@ -8453,7 +8499,7 @@
       </p:sp>
       <p:sp>
         <p:nvSpPr>
-          <p:cNvPr id="199" name="TextBox 198"/>
+          <p:cNvPr id="228" name="TextBox 227"/>
           <p:cNvSpPr txBox="1"/>
           <p:nvPr/>
         </p:nvSpPr>
@@ -8495,7 +8541,7 @@
       </p:sp>
       <p:sp>
         <p:nvSpPr>
-          <p:cNvPr id="200" name="TextBox 199"/>
+          <p:cNvPr id="229" name="TextBox 228"/>
           <p:cNvSpPr txBox="1"/>
           <p:nvPr/>
         </p:nvSpPr>
@@ -8537,7 +8583,7 @@
       </p:sp>
       <p:sp>
         <p:nvSpPr>
-          <p:cNvPr id="201" name="TextBox 200"/>
+          <p:cNvPr id="230" name="TextBox 229"/>
           <p:cNvSpPr txBox="1"/>
           <p:nvPr/>
         </p:nvSpPr>
@@ -8579,7 +8625,7 @@
       </p:sp>
       <p:sp>
         <p:nvSpPr>
-          <p:cNvPr id="202" name="TextBox 201"/>
+          <p:cNvPr id="231" name="TextBox 230"/>
           <p:cNvSpPr txBox="1"/>
           <p:nvPr/>
         </p:nvSpPr>
@@ -8621,7 +8667,7 @@
       </p:sp>
       <p:sp>
         <p:nvSpPr>
-          <p:cNvPr id="203" name="TextBox 202"/>
+          <p:cNvPr id="232" name="TextBox 231"/>
           <p:cNvSpPr txBox="1"/>
           <p:nvPr/>
         </p:nvSpPr>
@@ -8663,7 +8709,7 @@
       </p:sp>
       <p:sp>
         <p:nvSpPr>
-          <p:cNvPr id="204" name="TextBox 203"/>
+          <p:cNvPr id="233" name="TextBox 232"/>
           <p:cNvSpPr txBox="1"/>
           <p:nvPr/>
         </p:nvSpPr>
@@ -8705,7 +8751,7 @@
       </p:sp>
       <p:sp>
         <p:nvSpPr>
-          <p:cNvPr id="205" name="TextBox 204"/>
+          <p:cNvPr id="234" name="TextBox 233"/>
           <p:cNvSpPr txBox="1"/>
           <p:nvPr/>
         </p:nvSpPr>
@@ -8747,7 +8793,7 @@
       </p:sp>
       <p:sp>
         <p:nvSpPr>
-          <p:cNvPr id="206" name="TextBox 205"/>
+          <p:cNvPr id="235" name="TextBox 234"/>
           <p:cNvSpPr txBox="1"/>
           <p:nvPr/>
         </p:nvSpPr>
@@ -8789,7 +8835,7 @@
       </p:sp>
       <p:sp>
         <p:nvSpPr>
-          <p:cNvPr id="207" name="TextBox 206"/>
+          <p:cNvPr id="236" name="TextBox 235"/>
           <p:cNvSpPr txBox="1"/>
           <p:nvPr/>
         </p:nvSpPr>
@@ -8831,7 +8877,7 @@
       </p:sp>
       <p:sp>
         <p:nvSpPr>
-          <p:cNvPr id="208" name="TextBox 207"/>
+          <p:cNvPr id="237" name="TextBox 236"/>
           <p:cNvSpPr txBox="1"/>
           <p:nvPr/>
         </p:nvSpPr>
@@ -8873,7 +8919,7 @@
       </p:sp>
       <p:sp>
         <p:nvSpPr>
-          <p:cNvPr id="209" name="TextBox 208"/>
+          <p:cNvPr id="238" name="TextBox 237"/>
           <p:cNvSpPr txBox="1"/>
           <p:nvPr/>
         </p:nvSpPr>
@@ -8915,7 +8961,7 @@
       </p:sp>
       <p:sp>
         <p:nvSpPr>
-          <p:cNvPr id="210" name="TextBox 209"/>
+          <p:cNvPr id="239" name="TextBox 238"/>
           <p:cNvSpPr txBox="1"/>
           <p:nvPr/>
         </p:nvSpPr>
@@ -8957,7 +9003,7 @@
       </p:sp>
       <p:sp>
         <p:nvSpPr>
-          <p:cNvPr id="211" name="TextBox 210"/>
+          <p:cNvPr id="240" name="TextBox 239"/>
           <p:cNvSpPr txBox="1"/>
           <p:nvPr/>
         </p:nvSpPr>
@@ -8999,7 +9045,7 @@
       </p:sp>
       <p:sp>
         <p:nvSpPr>
-          <p:cNvPr id="212" name="TextBox 211"/>
+          <p:cNvPr id="241" name="TextBox 240"/>
           <p:cNvSpPr txBox="1"/>
           <p:nvPr/>
         </p:nvSpPr>
@@ -9041,7 +9087,7 @@
       </p:sp>
       <p:sp>
         <p:nvSpPr>
-          <p:cNvPr id="213" name="TextBox 212"/>
+          <p:cNvPr id="242" name="TextBox 241"/>
           <p:cNvSpPr txBox="1"/>
           <p:nvPr/>
         </p:nvSpPr>
@@ -9083,7 +9129,7 @@
       </p:sp>
       <p:sp>
         <p:nvSpPr>
-          <p:cNvPr id="214" name="Rounded Rectangle 213"/>
+          <p:cNvPr id="243" name="Rounded Rectangle 242"/>
           <p:cNvSpPr/>
           <p:nvPr/>
         </p:nvSpPr>
@@ -9129,7 +9175,7 @@
       </p:sp>
       <p:sp>
         <p:nvSpPr>
-          <p:cNvPr id="215" name="TextBox 214"/>
+          <p:cNvPr id="244" name="TextBox 243"/>
           <p:cNvSpPr txBox="1"/>
           <p:nvPr/>
         </p:nvSpPr>
@@ -9171,7 +9217,7 @@
       </p:sp>
       <p:sp>
         <p:nvSpPr>
-          <p:cNvPr id="216" name="TextBox 215"/>
+          <p:cNvPr id="245" name="TextBox 244"/>
           <p:cNvSpPr txBox="1"/>
           <p:nvPr/>
         </p:nvSpPr>
@@ -9213,7 +9259,7 @@
       </p:sp>
       <p:sp>
         <p:nvSpPr>
-          <p:cNvPr id="217" name="TextBox 216"/>
+          <p:cNvPr id="246" name="TextBox 245"/>
           <p:cNvSpPr txBox="1"/>
           <p:nvPr/>
         </p:nvSpPr>
@@ -9255,7 +9301,7 @@
       </p:sp>
       <p:sp>
         <p:nvSpPr>
-          <p:cNvPr id="218" name="TextBox 217"/>
+          <p:cNvPr id="247" name="TextBox 246"/>
           <p:cNvSpPr txBox="1"/>
           <p:nvPr/>
         </p:nvSpPr>
@@ -9297,7 +9343,7 @@
       </p:sp>
       <p:sp>
         <p:nvSpPr>
-          <p:cNvPr id="219" name="TextBox 218"/>
+          <p:cNvPr id="248" name="TextBox 247"/>
           <p:cNvSpPr txBox="1"/>
           <p:nvPr/>
         </p:nvSpPr>
@@ -9339,7 +9385,7 @@
       </p:sp>
       <p:sp>
         <p:nvSpPr>
-          <p:cNvPr id="220" name="TextBox 219"/>
+          <p:cNvPr id="249" name="TextBox 248"/>
           <p:cNvSpPr txBox="1"/>
           <p:nvPr/>
         </p:nvSpPr>
@@ -9381,7 +9427,7 @@
       </p:sp>
       <p:sp>
         <p:nvSpPr>
-          <p:cNvPr id="221" name="TextBox 220"/>
+          <p:cNvPr id="250" name="TextBox 249"/>
           <p:cNvSpPr txBox="1"/>
           <p:nvPr/>
         </p:nvSpPr>
@@ -9423,7 +9469,7 @@
       </p:sp>
       <p:sp>
         <p:nvSpPr>
-          <p:cNvPr id="222" name="TextBox 221"/>
+          <p:cNvPr id="251" name="TextBox 250"/>
           <p:cNvSpPr txBox="1"/>
           <p:nvPr/>
         </p:nvSpPr>
@@ -9465,7 +9511,7 @@
       </p:sp>
       <p:sp>
         <p:nvSpPr>
-          <p:cNvPr id="223" name="TextBox 222"/>
+          <p:cNvPr id="252" name="TextBox 251"/>
           <p:cNvSpPr txBox="1"/>
           <p:nvPr/>
         </p:nvSpPr>
@@ -10562,9 +10608,429 @@
           </a:p>
         </p:txBody>
       </p:sp>
-      <p:sp>
-        <p:nvSpPr>
-          <p:cNvPr id="182" name="TextBox 181"/>
+      <p:pic>
+        <p:nvPicPr>
+          <p:cNvPr id="184" name="Picture 183" descr="image.png"/>
+          <p:cNvPicPr>
+            <a:picLocks noChangeAspect="1"/>
+          </p:cNvPicPr>
+          <p:nvPr/>
+        </p:nvPicPr>
+        <p:blipFill>
+          <a:blip r:embed="rId6"/>
+          <a:stretch>
+            <a:fillRect/>
+          </a:stretch>
+        </p:blipFill>
+        <p:spPr>
+          <a:xfrm>
+            <a:off x="3227832" y="1298448"/>
+            <a:ext cx="2697480" cy="1234440"/>
+          </a:xfrm>
+          <a:prstGeom prst="rect">
+            <a:avLst/>
+          </a:prstGeom>
+        </p:spPr>
+      </p:pic>
+      <p:sp>
+        <p:nvSpPr>
+          <p:cNvPr id="185" name="Rounded Rectangle 184"/>
+          <p:cNvSpPr/>
+          <p:nvPr/>
+        </p:nvSpPr>
+        <p:spPr>
+          <a:xfrm>
+            <a:off x="3227832" y="1298448"/>
+            <a:ext cx="2697480" cy="1234440"/>
+          </a:xfrm>
+          <a:prstGeom prst="roundRect">
+            <a:avLst>
+              <a:gd name="adj" fmla="val 2000"/>
+            </a:avLst>
+          </a:prstGeom>
+          <a:noFill/>
+          <a:ln w="9525">
+            <a:solidFill>
+              <a:srgbClr val="E2E8F0"/>
+            </a:solidFill>
+          </a:ln>
+          <a:effectLst/>
+        </p:spPr>
+        <p:style>
+          <a:lnRef idx="1">
+            <a:schemeClr val="accent1"/>
+          </a:lnRef>
+          <a:fillRef idx="3">
+            <a:schemeClr val="accent1"/>
+          </a:fillRef>
+          <a:effectRef idx="2">
+            <a:schemeClr val="accent1"/>
+          </a:effectRef>
+          <a:fontRef idx="minor">
+            <a:schemeClr val="lt1"/>
+          </a:fontRef>
+        </p:style>
+        <p:txBody>
+          <a:bodyPr rtlCol="0" anchor="ctr"/>
+          <a:lstStyle/>
+          <a:p>
+            <a:pPr algn="ctr"/>
+          </a:p>
+        </p:txBody>
+      </p:sp>
+      <p:pic>
+        <p:nvPicPr>
+          <p:cNvPr id="188" name="Picture 187" descr="image.png"/>
+          <p:cNvPicPr>
+            <a:picLocks noChangeAspect="1"/>
+          </p:cNvPicPr>
+          <p:nvPr/>
+        </p:nvPicPr>
+        <p:blipFill>
+          <a:blip r:embed="rId7"/>
+          <a:stretch>
+            <a:fillRect/>
+          </a:stretch>
+        </p:blipFill>
+        <p:spPr>
+          <a:xfrm>
+            <a:off x="6071616" y="1298448"/>
+            <a:ext cx="2697480" cy="1234440"/>
+          </a:xfrm>
+          <a:prstGeom prst="rect">
+            <a:avLst/>
+          </a:prstGeom>
+        </p:spPr>
+      </p:pic>
+      <p:sp>
+        <p:nvSpPr>
+          <p:cNvPr id="189" name="Rounded Rectangle 188"/>
+          <p:cNvSpPr/>
+          <p:nvPr/>
+        </p:nvSpPr>
+        <p:spPr>
+          <a:xfrm>
+            <a:off x="6071616" y="1298448"/>
+            <a:ext cx="2697480" cy="1234440"/>
+          </a:xfrm>
+          <a:prstGeom prst="roundRect">
+            <a:avLst>
+              <a:gd name="adj" fmla="val 2000"/>
+            </a:avLst>
+          </a:prstGeom>
+          <a:noFill/>
+          <a:ln w="9525">
+            <a:solidFill>
+              <a:srgbClr val="E2E8F0"/>
+            </a:solidFill>
+          </a:ln>
+          <a:effectLst/>
+        </p:spPr>
+        <p:style>
+          <a:lnRef idx="1">
+            <a:schemeClr val="accent1"/>
+          </a:lnRef>
+          <a:fillRef idx="3">
+            <a:schemeClr val="accent1"/>
+          </a:fillRef>
+          <a:effectRef idx="2">
+            <a:schemeClr val="accent1"/>
+          </a:effectRef>
+          <a:fontRef idx="minor">
+            <a:schemeClr val="lt1"/>
+          </a:fontRef>
+        </p:style>
+        <p:txBody>
+          <a:bodyPr rtlCol="0" anchor="ctr"/>
+          <a:lstStyle/>
+          <a:p>
+            <a:pPr algn="ctr"/>
+          </a:p>
+        </p:txBody>
+      </p:sp>
+      <p:pic>
+        <p:nvPicPr>
+          <p:cNvPr id="192" name="Picture 191" descr="image.png"/>
+          <p:cNvPicPr>
+            <a:picLocks noChangeAspect="1"/>
+          </p:cNvPicPr>
+          <p:nvPr/>
+        </p:nvPicPr>
+        <p:blipFill>
+          <a:blip r:embed="rId8"/>
+          <a:stretch>
+            <a:fillRect/>
+          </a:stretch>
+        </p:blipFill>
+        <p:spPr>
+          <a:xfrm>
+            <a:off x="384048" y="3374136"/>
+            <a:ext cx="2697480" cy="1234440"/>
+          </a:xfrm>
+          <a:prstGeom prst="rect">
+            <a:avLst/>
+          </a:prstGeom>
+        </p:spPr>
+      </p:pic>
+      <p:sp>
+        <p:nvSpPr>
+          <p:cNvPr id="193" name="Rounded Rectangle 192"/>
+          <p:cNvSpPr/>
+          <p:nvPr/>
+        </p:nvSpPr>
+        <p:spPr>
+          <a:xfrm>
+            <a:off x="384048" y="3374136"/>
+            <a:ext cx="2697480" cy="1234440"/>
+          </a:xfrm>
+          <a:prstGeom prst="roundRect">
+            <a:avLst>
+              <a:gd name="adj" fmla="val 2000"/>
+            </a:avLst>
+          </a:prstGeom>
+          <a:noFill/>
+          <a:ln w="9525">
+            <a:solidFill>
+              <a:srgbClr val="E2E8F0"/>
+            </a:solidFill>
+          </a:ln>
+          <a:effectLst/>
+        </p:spPr>
+        <p:style>
+          <a:lnRef idx="1">
+            <a:schemeClr val="accent1"/>
+          </a:lnRef>
+          <a:fillRef idx="3">
+            <a:schemeClr val="accent1"/>
+          </a:fillRef>
+          <a:effectRef idx="2">
+            <a:schemeClr val="accent1"/>
+          </a:effectRef>
+          <a:fontRef idx="minor">
+            <a:schemeClr val="lt1"/>
+          </a:fontRef>
+        </p:style>
+        <p:txBody>
+          <a:bodyPr rtlCol="0" anchor="ctr"/>
+          <a:lstStyle/>
+          <a:p>
+            <a:pPr algn="ctr"/>
+          </a:p>
+        </p:txBody>
+      </p:sp>
+      <p:pic>
+        <p:nvPicPr>
+          <p:cNvPr id="196" name="Picture 195" descr="image.png"/>
+          <p:cNvPicPr>
+            <a:picLocks noChangeAspect="1"/>
+          </p:cNvPicPr>
+          <p:nvPr/>
+        </p:nvPicPr>
+        <p:blipFill>
+          <a:blip r:embed="rId9"/>
+          <a:stretch>
+            <a:fillRect/>
+          </a:stretch>
+        </p:blipFill>
+        <p:spPr>
+          <a:xfrm>
+            <a:off x="3227832" y="3374136"/>
+            <a:ext cx="2697480" cy="1234440"/>
+          </a:xfrm>
+          <a:prstGeom prst="rect">
+            <a:avLst/>
+          </a:prstGeom>
+        </p:spPr>
+      </p:pic>
+      <p:sp>
+        <p:nvSpPr>
+          <p:cNvPr id="197" name="Rounded Rectangle 196"/>
+          <p:cNvSpPr/>
+          <p:nvPr/>
+        </p:nvSpPr>
+        <p:spPr>
+          <a:xfrm>
+            <a:off x="3227832" y="3374136"/>
+            <a:ext cx="2697480" cy="1234440"/>
+          </a:xfrm>
+          <a:prstGeom prst="roundRect">
+            <a:avLst>
+              <a:gd name="adj" fmla="val 2000"/>
+            </a:avLst>
+          </a:prstGeom>
+          <a:noFill/>
+          <a:ln w="9525">
+            <a:solidFill>
+              <a:srgbClr val="E2E8F0"/>
+            </a:solidFill>
+          </a:ln>
+          <a:effectLst/>
+        </p:spPr>
+        <p:style>
+          <a:lnRef idx="1">
+            <a:schemeClr val="accent1"/>
+          </a:lnRef>
+          <a:fillRef idx="3">
+            <a:schemeClr val="accent1"/>
+          </a:fillRef>
+          <a:effectRef idx="2">
+            <a:schemeClr val="accent1"/>
+          </a:effectRef>
+          <a:fontRef idx="minor">
+            <a:schemeClr val="lt1"/>
+          </a:fontRef>
+        </p:style>
+        <p:txBody>
+          <a:bodyPr rtlCol="0" anchor="ctr"/>
+          <a:lstStyle/>
+          <a:p>
+            <a:pPr algn="ctr"/>
+          </a:p>
+        </p:txBody>
+      </p:sp>
+      <p:pic>
+        <p:nvPicPr>
+          <p:cNvPr id="200" name="Picture 199" descr="image.png"/>
+          <p:cNvPicPr>
+            <a:picLocks noChangeAspect="1"/>
+          </p:cNvPicPr>
+          <p:nvPr/>
+        </p:nvPicPr>
+        <p:blipFill>
+          <a:blip r:embed="rId10"/>
+          <a:stretch>
+            <a:fillRect/>
+          </a:stretch>
+        </p:blipFill>
+        <p:spPr>
+          <a:xfrm>
+            <a:off x="6071616" y="3374136"/>
+            <a:ext cx="2697480" cy="1234440"/>
+          </a:xfrm>
+          <a:prstGeom prst="rect">
+            <a:avLst/>
+          </a:prstGeom>
+        </p:spPr>
+      </p:pic>
+      <p:sp>
+        <p:nvSpPr>
+          <p:cNvPr id="201" name="Rounded Rectangle 200"/>
+          <p:cNvSpPr/>
+          <p:nvPr/>
+        </p:nvSpPr>
+        <p:spPr>
+          <a:xfrm>
+            <a:off x="6071616" y="3374136"/>
+            <a:ext cx="2697480" cy="1234440"/>
+          </a:xfrm>
+          <a:prstGeom prst="roundRect">
+            <a:avLst>
+              <a:gd name="adj" fmla="val 2000"/>
+            </a:avLst>
+          </a:prstGeom>
+          <a:noFill/>
+          <a:ln w="9525">
+            <a:solidFill>
+              <a:srgbClr val="E2E8F0"/>
+            </a:solidFill>
+          </a:ln>
+          <a:effectLst/>
+        </p:spPr>
+        <p:style>
+          <a:lnRef idx="1">
+            <a:schemeClr val="accent1"/>
+          </a:lnRef>
+          <a:fillRef idx="3">
+            <a:schemeClr val="accent1"/>
+          </a:fillRef>
+          <a:effectRef idx="2">
+            <a:schemeClr val="accent1"/>
+          </a:effectRef>
+          <a:fontRef idx="minor">
+            <a:schemeClr val="lt1"/>
+          </a:fontRef>
+        </p:style>
+        <p:txBody>
+          <a:bodyPr rtlCol="0" anchor="ctr"/>
+          <a:lstStyle/>
+          <a:p>
+            <a:pPr algn="ctr"/>
+          </a:p>
+        </p:txBody>
+      </p:sp>
+      <p:pic>
+        <p:nvPicPr>
+          <p:cNvPr id="202" name="Picture 201" descr="image.png"/>
+          <p:cNvPicPr>
+            <a:picLocks noChangeAspect="1"/>
+          </p:cNvPicPr>
+          <p:nvPr/>
+        </p:nvPicPr>
+        <p:blipFill>
+          <a:blip r:embed="rId5"/>
+          <a:stretch>
+            <a:fillRect/>
+          </a:stretch>
+        </p:blipFill>
+        <p:spPr>
+          <a:xfrm>
+            <a:off x="384048" y="1298448"/>
+            <a:ext cx="2697480" cy="1234440"/>
+          </a:xfrm>
+          <a:prstGeom prst="rect">
+            <a:avLst/>
+          </a:prstGeom>
+        </p:spPr>
+      </p:pic>
+      <p:sp>
+        <p:nvSpPr>
+          <p:cNvPr id="203" name="Rounded Rectangle 202"/>
+          <p:cNvSpPr/>
+          <p:nvPr/>
+        </p:nvSpPr>
+        <p:spPr>
+          <a:xfrm>
+            <a:off x="384048" y="1298448"/>
+            <a:ext cx="2697480" cy="1234440"/>
+          </a:xfrm>
+          <a:prstGeom prst="roundRect">
+            <a:avLst>
+              <a:gd name="adj" fmla="val 2000"/>
+            </a:avLst>
+          </a:prstGeom>
+          <a:noFill/>
+          <a:ln w="9525">
+            <a:solidFill>
+              <a:srgbClr val="E2E8F0"/>
+            </a:solidFill>
+          </a:ln>
+          <a:effectLst/>
+        </p:spPr>
+        <p:style>
+          <a:lnRef idx="1">
+            <a:schemeClr val="accent1"/>
+          </a:lnRef>
+          <a:fillRef idx="3">
+            <a:schemeClr val="accent1"/>
+          </a:fillRef>
+          <a:effectRef idx="2">
+            <a:schemeClr val="accent1"/>
+          </a:effectRef>
+          <a:fontRef idx="minor">
+            <a:schemeClr val="lt1"/>
+          </a:fontRef>
+        </p:style>
+        <p:txBody>
+          <a:bodyPr rtlCol="0" anchor="ctr"/>
+          <a:lstStyle/>
+          <a:p>
+            <a:pPr algn="ctr"/>
+          </a:p>
+        </p:txBody>
+      </p:sp>
+      <p:sp>
+        <p:nvSpPr>
+          <p:cNvPr id="204" name="TextBox 203"/>
           <p:cNvSpPr txBox="1"/>
           <p:nvPr/>
         </p:nvSpPr>
@@ -10606,7 +11072,7 @@
       </p:sp>
       <p:sp>
         <p:nvSpPr>
-          <p:cNvPr id="183" name="TextBox 182"/>
+          <p:cNvPr id="205" name="TextBox 204"/>
           <p:cNvSpPr txBox="1"/>
           <p:nvPr/>
         </p:nvSpPr>
@@ -10648,7 +11114,7 @@
       </p:sp>
       <p:pic>
         <p:nvPicPr>
-          <p:cNvPr id="184" name="Picture 183" descr="image.png"/>
+          <p:cNvPr id="206" name="Picture 205" descr="image.png"/>
           <p:cNvPicPr>
             <a:picLocks noChangeAspect="1"/>
           </p:cNvPicPr>
@@ -10672,7 +11138,7 @@
       </p:pic>
       <p:sp>
         <p:nvSpPr>
-          <p:cNvPr id="185" name="Rounded Rectangle 184"/>
+          <p:cNvPr id="207" name="Rounded Rectangle 206"/>
           <p:cNvSpPr/>
           <p:nvPr/>
         </p:nvSpPr>
@@ -10718,7 +11184,7 @@
       </p:sp>
       <p:sp>
         <p:nvSpPr>
-          <p:cNvPr id="186" name="TextBox 185"/>
+          <p:cNvPr id="208" name="TextBox 207"/>
           <p:cNvSpPr txBox="1"/>
           <p:nvPr/>
         </p:nvSpPr>
@@ -10760,7 +11226,7 @@
       </p:sp>
       <p:sp>
         <p:nvSpPr>
-          <p:cNvPr id="187" name="TextBox 186"/>
+          <p:cNvPr id="209" name="TextBox 208"/>
           <p:cNvSpPr txBox="1"/>
           <p:nvPr/>
         </p:nvSpPr>
@@ -10802,7 +11268,7 @@
       </p:sp>
       <p:pic>
         <p:nvPicPr>
-          <p:cNvPr id="188" name="Picture 187" descr="image.png"/>
+          <p:cNvPr id="210" name="Picture 209" descr="image.png"/>
           <p:cNvPicPr>
             <a:picLocks noChangeAspect="1"/>
           </p:cNvPicPr>
@@ -10826,7 +11292,7 @@
       </p:pic>
       <p:sp>
         <p:nvSpPr>
-          <p:cNvPr id="189" name="Rounded Rectangle 188"/>
+          <p:cNvPr id="211" name="Rounded Rectangle 210"/>
           <p:cNvSpPr/>
           <p:nvPr/>
         </p:nvSpPr>
@@ -10872,7 +11338,7 @@
       </p:sp>
       <p:sp>
         <p:nvSpPr>
-          <p:cNvPr id="190" name="TextBox 189"/>
+          <p:cNvPr id="212" name="TextBox 211"/>
           <p:cNvSpPr txBox="1"/>
           <p:nvPr/>
         </p:nvSpPr>
@@ -10914,7 +11380,7 @@
       </p:sp>
       <p:sp>
         <p:nvSpPr>
-          <p:cNvPr id="191" name="TextBox 190"/>
+          <p:cNvPr id="213" name="TextBox 212"/>
           <p:cNvSpPr txBox="1"/>
           <p:nvPr/>
         </p:nvSpPr>
@@ -10956,7 +11422,7 @@
       </p:sp>
       <p:pic>
         <p:nvPicPr>
-          <p:cNvPr id="192" name="Picture 191" descr="image.png"/>
+          <p:cNvPr id="214" name="Picture 213" descr="image.png"/>
           <p:cNvPicPr>
             <a:picLocks noChangeAspect="1"/>
           </p:cNvPicPr>
@@ -10980,7 +11446,7 @@
       </p:pic>
       <p:sp>
         <p:nvSpPr>
-          <p:cNvPr id="193" name="Rounded Rectangle 192"/>
+          <p:cNvPr id="215" name="Rounded Rectangle 214"/>
           <p:cNvSpPr/>
           <p:nvPr/>
         </p:nvSpPr>
@@ -11026,7 +11492,7 @@
       </p:sp>
       <p:sp>
         <p:nvSpPr>
-          <p:cNvPr id="194" name="TextBox 193"/>
+          <p:cNvPr id="216" name="TextBox 215"/>
           <p:cNvSpPr txBox="1"/>
           <p:nvPr/>
         </p:nvSpPr>
@@ -11068,7 +11534,7 @@
       </p:sp>
       <p:sp>
         <p:nvSpPr>
-          <p:cNvPr id="195" name="TextBox 194"/>
+          <p:cNvPr id="217" name="TextBox 216"/>
           <p:cNvSpPr txBox="1"/>
           <p:nvPr/>
         </p:nvSpPr>
@@ -11110,7 +11576,7 @@
       </p:sp>
       <p:pic>
         <p:nvPicPr>
-          <p:cNvPr id="196" name="Picture 195" descr="image.png"/>
+          <p:cNvPr id="218" name="Picture 217" descr="image.png"/>
           <p:cNvPicPr>
             <a:picLocks noChangeAspect="1"/>
           </p:cNvPicPr>
@@ -11134,7 +11600,7 @@
       </p:pic>
       <p:sp>
         <p:nvSpPr>
-          <p:cNvPr id="197" name="Rounded Rectangle 196"/>
+          <p:cNvPr id="219" name="Rounded Rectangle 218"/>
           <p:cNvSpPr/>
           <p:nvPr/>
         </p:nvSpPr>
@@ -11180,7 +11646,7 @@
       </p:sp>
       <p:sp>
         <p:nvSpPr>
-          <p:cNvPr id="198" name="TextBox 197"/>
+          <p:cNvPr id="220" name="TextBox 219"/>
           <p:cNvSpPr txBox="1"/>
           <p:nvPr/>
         </p:nvSpPr>
@@ -11222,7 +11688,7 @@
       </p:sp>
       <p:sp>
         <p:nvSpPr>
-          <p:cNvPr id="199" name="TextBox 198"/>
+          <p:cNvPr id="221" name="TextBox 220"/>
           <p:cNvSpPr txBox="1"/>
           <p:nvPr/>
         </p:nvSpPr>
@@ -11264,7 +11730,7 @@
       </p:sp>
       <p:pic>
         <p:nvPicPr>
-          <p:cNvPr id="200" name="Picture 199" descr="image.png"/>
+          <p:cNvPr id="222" name="Picture 221" descr="image.png"/>
           <p:cNvPicPr>
             <a:picLocks noChangeAspect="1"/>
           </p:cNvPicPr>
@@ -11288,7 +11754,7 @@
       </p:pic>
       <p:sp>
         <p:nvSpPr>
-          <p:cNvPr id="201" name="Rounded Rectangle 200"/>
+          <p:cNvPr id="223" name="Rounded Rectangle 222"/>
           <p:cNvSpPr/>
           <p:nvPr/>
         </p:nvSpPr>
@@ -11334,7 +11800,7 @@
       </p:sp>
       <p:sp>
         <p:nvSpPr>
-          <p:cNvPr id="202" name="TextBox 201"/>
+          <p:cNvPr id="224" name="TextBox 223"/>
           <p:cNvSpPr txBox="1"/>
           <p:nvPr/>
         </p:nvSpPr>
@@ -11376,7 +11842,7 @@
       </p:sp>
       <p:sp>
         <p:nvSpPr>
-          <p:cNvPr id="203" name="TextBox 202"/>
+          <p:cNvPr id="225" name="TextBox 224"/>
           <p:cNvSpPr txBox="1"/>
           <p:nvPr/>
         </p:nvSpPr>
@@ -11744,7 +12210,103 @@
       </p:sp>
       <p:sp>
         <p:nvSpPr>
-          <p:cNvPr id="214" name="TextBox 213"/>
+          <p:cNvPr id="245" name="Rounded Rectangle 244"/>
+          <p:cNvSpPr/>
+          <p:nvPr/>
+        </p:nvSpPr>
+        <p:spPr>
+          <a:xfrm>
+            <a:off x="4892040" y="1691640"/>
+            <a:ext cx="3794760" cy="1783080"/>
+          </a:xfrm>
+          <a:prstGeom prst="roundRect">
+            <a:avLst>
+              <a:gd name="adj" fmla="val 4000"/>
+            </a:avLst>
+          </a:prstGeom>
+          <a:solidFill>
+            <a:srgbClr val="FFFBEB"/>
+          </a:solidFill>
+          <a:ln w="9525">
+            <a:solidFill>
+              <a:srgbClr val="F59E0B"/>
+            </a:solidFill>
+          </a:ln>
+          <a:effectLst/>
+        </p:spPr>
+        <p:style>
+          <a:lnRef idx="1">
+            <a:schemeClr val="accent1"/>
+          </a:lnRef>
+          <a:fillRef idx="3">
+            <a:schemeClr val="accent1"/>
+          </a:fillRef>
+          <a:effectRef idx="2">
+            <a:schemeClr val="accent1"/>
+          </a:effectRef>
+          <a:fontRef idx="minor">
+            <a:schemeClr val="lt1"/>
+          </a:fontRef>
+        </p:style>
+        <p:txBody>
+          <a:bodyPr rtlCol="0" anchor="ctr"/>
+          <a:lstStyle/>
+          <a:p>
+            <a:pPr algn="ctr"/>
+          </a:p>
+        </p:txBody>
+      </p:sp>
+      <p:sp>
+        <p:nvSpPr>
+          <p:cNvPr id="248" name="Rounded Rectangle 247"/>
+          <p:cNvSpPr/>
+          <p:nvPr/>
+        </p:nvSpPr>
+        <p:spPr>
+          <a:xfrm>
+            <a:off x="4892040" y="3611880"/>
+            <a:ext cx="3794760" cy="1234440"/>
+          </a:xfrm>
+          <a:prstGeom prst="roundRect">
+            <a:avLst>
+              <a:gd name="adj" fmla="val 4000"/>
+            </a:avLst>
+          </a:prstGeom>
+          <a:solidFill>
+            <a:srgbClr val="F8FAFC"/>
+          </a:solidFill>
+          <a:ln w="9525">
+            <a:solidFill>
+              <a:srgbClr val="E2E8F0"/>
+            </a:solidFill>
+          </a:ln>
+          <a:effectLst/>
+        </p:spPr>
+        <p:style>
+          <a:lnRef idx="1">
+            <a:schemeClr val="accent1"/>
+          </a:lnRef>
+          <a:fillRef idx="3">
+            <a:schemeClr val="accent1"/>
+          </a:fillRef>
+          <a:effectRef idx="2">
+            <a:schemeClr val="accent1"/>
+          </a:effectRef>
+          <a:fontRef idx="minor">
+            <a:schemeClr val="lt1"/>
+          </a:fontRef>
+        </p:style>
+        <p:txBody>
+          <a:bodyPr rtlCol="0" anchor="ctr"/>
+          <a:lstStyle/>
+          <a:p>
+            <a:pPr algn="ctr"/>
+          </a:p>
+        </p:txBody>
+      </p:sp>
+      <p:sp>
+        <p:nvSpPr>
+          <p:cNvPr id="249" name="TextBox 248"/>
           <p:cNvSpPr txBox="1"/>
           <p:nvPr/>
         </p:nvSpPr>
@@ -11786,7 +12348,7 @@
       </p:sp>
       <p:sp>
         <p:nvSpPr>
-          <p:cNvPr id="215" name="TextBox 214"/>
+          <p:cNvPr id="250" name="TextBox 249"/>
           <p:cNvSpPr txBox="1"/>
           <p:nvPr/>
         </p:nvSpPr>
@@ -11828,7 +12390,7 @@
       </p:sp>
       <p:sp>
         <p:nvSpPr>
-          <p:cNvPr id="216" name="TextBox 215"/>
+          <p:cNvPr id="251" name="TextBox 250"/>
           <p:cNvSpPr txBox="1"/>
           <p:nvPr/>
         </p:nvSpPr>
@@ -11870,7 +12432,7 @@
       </p:sp>
       <p:sp>
         <p:nvSpPr>
-          <p:cNvPr id="217" name="TextBox 216"/>
+          <p:cNvPr id="252" name="TextBox 251"/>
           <p:cNvSpPr txBox="1"/>
           <p:nvPr/>
         </p:nvSpPr>
@@ -11912,7 +12474,7 @@
       </p:sp>
       <p:sp>
         <p:nvSpPr>
-          <p:cNvPr id="218" name="TextBox 217"/>
+          <p:cNvPr id="253" name="TextBox 252"/>
           <p:cNvSpPr txBox="1"/>
           <p:nvPr/>
         </p:nvSpPr>
@@ -11954,7 +12516,7 @@
       </p:sp>
       <p:sp>
         <p:nvSpPr>
-          <p:cNvPr id="219" name="TextBox 218"/>
+          <p:cNvPr id="254" name="TextBox 253"/>
           <p:cNvSpPr txBox="1"/>
           <p:nvPr/>
         </p:nvSpPr>
@@ -11996,7 +12558,7 @@
       </p:sp>
       <p:sp>
         <p:nvSpPr>
-          <p:cNvPr id="220" name="TextBox 219"/>
+          <p:cNvPr id="255" name="TextBox 254"/>
           <p:cNvSpPr txBox="1"/>
           <p:nvPr/>
         </p:nvSpPr>
@@ -12038,7 +12600,7 @@
       </p:sp>
       <p:sp>
         <p:nvSpPr>
-          <p:cNvPr id="221" name="TextBox 220"/>
+          <p:cNvPr id="256" name="TextBox 255"/>
           <p:cNvSpPr txBox="1"/>
           <p:nvPr/>
         </p:nvSpPr>
@@ -12080,7 +12642,7 @@
       </p:sp>
       <p:sp>
         <p:nvSpPr>
-          <p:cNvPr id="222" name="TextBox 221"/>
+          <p:cNvPr id="257" name="TextBox 256"/>
           <p:cNvSpPr txBox="1"/>
           <p:nvPr/>
         </p:nvSpPr>
@@ -12122,7 +12684,7 @@
       </p:sp>
       <p:sp>
         <p:nvSpPr>
-          <p:cNvPr id="223" name="TextBox 222"/>
+          <p:cNvPr id="258" name="TextBox 257"/>
           <p:cNvSpPr txBox="1"/>
           <p:nvPr/>
         </p:nvSpPr>
@@ -12164,7 +12726,7 @@
       </p:sp>
       <p:sp>
         <p:nvSpPr>
-          <p:cNvPr id="224" name="TextBox 223"/>
+          <p:cNvPr id="259" name="TextBox 258"/>
           <p:cNvSpPr txBox="1"/>
           <p:nvPr/>
         </p:nvSpPr>
@@ -12206,7 +12768,7 @@
       </p:sp>
       <p:sp>
         <p:nvSpPr>
-          <p:cNvPr id="225" name="TextBox 224"/>
+          <p:cNvPr id="260" name="TextBox 259"/>
           <p:cNvSpPr txBox="1"/>
           <p:nvPr/>
         </p:nvSpPr>
@@ -12248,7 +12810,7 @@
       </p:sp>
       <p:sp>
         <p:nvSpPr>
-          <p:cNvPr id="226" name="TextBox 225"/>
+          <p:cNvPr id="261" name="TextBox 260"/>
           <p:cNvSpPr txBox="1"/>
           <p:nvPr/>
         </p:nvSpPr>
@@ -12290,7 +12852,7 @@
       </p:sp>
       <p:sp>
         <p:nvSpPr>
-          <p:cNvPr id="227" name="TextBox 226"/>
+          <p:cNvPr id="262" name="TextBox 261"/>
           <p:cNvSpPr txBox="1"/>
           <p:nvPr/>
         </p:nvSpPr>
@@ -12332,7 +12894,7 @@
       </p:sp>
       <p:sp>
         <p:nvSpPr>
-          <p:cNvPr id="228" name="TextBox 227"/>
+          <p:cNvPr id="263" name="TextBox 262"/>
           <p:cNvSpPr txBox="1"/>
           <p:nvPr/>
         </p:nvSpPr>
@@ -12374,7 +12936,7 @@
       </p:sp>
       <p:sp>
         <p:nvSpPr>
-          <p:cNvPr id="229" name="TextBox 228"/>
+          <p:cNvPr id="264" name="TextBox 263"/>
           <p:cNvSpPr txBox="1"/>
           <p:nvPr/>
         </p:nvSpPr>
@@ -12416,7 +12978,7 @@
       </p:sp>
       <p:sp>
         <p:nvSpPr>
-          <p:cNvPr id="230" name="TextBox 229"/>
+          <p:cNvPr id="265" name="TextBox 264"/>
           <p:cNvSpPr txBox="1"/>
           <p:nvPr/>
         </p:nvSpPr>
@@ -12458,7 +13020,7 @@
       </p:sp>
       <p:sp>
         <p:nvSpPr>
-          <p:cNvPr id="231" name="TextBox 230"/>
+          <p:cNvPr id="266" name="TextBox 265"/>
           <p:cNvSpPr txBox="1"/>
           <p:nvPr/>
         </p:nvSpPr>
@@ -12500,7 +13062,7 @@
       </p:sp>
       <p:sp>
         <p:nvSpPr>
-          <p:cNvPr id="232" name="TextBox 231"/>
+          <p:cNvPr id="267" name="TextBox 266"/>
           <p:cNvSpPr txBox="1"/>
           <p:nvPr/>
         </p:nvSpPr>
@@ -12542,7 +13104,7 @@
       </p:sp>
       <p:sp>
         <p:nvSpPr>
-          <p:cNvPr id="233" name="TextBox 232"/>
+          <p:cNvPr id="268" name="TextBox 267"/>
           <p:cNvSpPr txBox="1"/>
           <p:nvPr/>
         </p:nvSpPr>
@@ -12584,7 +13146,7 @@
       </p:sp>
       <p:sp>
         <p:nvSpPr>
-          <p:cNvPr id="234" name="TextBox 233"/>
+          <p:cNvPr id="269" name="TextBox 268"/>
           <p:cNvSpPr txBox="1"/>
           <p:nvPr/>
         </p:nvSpPr>
@@ -12626,7 +13188,7 @@
       </p:sp>
       <p:sp>
         <p:nvSpPr>
-          <p:cNvPr id="235" name="TextBox 234"/>
+          <p:cNvPr id="270" name="TextBox 269"/>
           <p:cNvSpPr txBox="1"/>
           <p:nvPr/>
         </p:nvSpPr>
@@ -12668,7 +13230,7 @@
       </p:sp>
       <p:sp>
         <p:nvSpPr>
-          <p:cNvPr id="236" name="TextBox 235"/>
+          <p:cNvPr id="271" name="TextBox 270"/>
           <p:cNvSpPr txBox="1"/>
           <p:nvPr/>
         </p:nvSpPr>
@@ -12710,7 +13272,7 @@
       </p:sp>
       <p:sp>
         <p:nvSpPr>
-          <p:cNvPr id="237" name="TextBox 236"/>
+          <p:cNvPr id="272" name="TextBox 271"/>
           <p:cNvSpPr txBox="1"/>
           <p:nvPr/>
         </p:nvSpPr>
@@ -12752,7 +13314,7 @@
       </p:sp>
       <p:sp>
         <p:nvSpPr>
-          <p:cNvPr id="238" name="TextBox 237"/>
+          <p:cNvPr id="273" name="TextBox 272"/>
           <p:cNvSpPr txBox="1"/>
           <p:nvPr/>
         </p:nvSpPr>
@@ -12794,7 +13356,7 @@
       </p:sp>
       <p:sp>
         <p:nvSpPr>
-          <p:cNvPr id="239" name="TextBox 238"/>
+          <p:cNvPr id="274" name="TextBox 273"/>
           <p:cNvSpPr txBox="1"/>
           <p:nvPr/>
         </p:nvSpPr>
@@ -12836,7 +13398,7 @@
       </p:sp>
       <p:sp>
         <p:nvSpPr>
-          <p:cNvPr id="240" name="TextBox 239"/>
+          <p:cNvPr id="275" name="TextBox 274"/>
           <p:cNvSpPr txBox="1"/>
           <p:nvPr/>
         </p:nvSpPr>
@@ -12878,7 +13440,7 @@
       </p:sp>
       <p:sp>
         <p:nvSpPr>
-          <p:cNvPr id="241" name="TextBox 240"/>
+          <p:cNvPr id="276" name="TextBox 275"/>
           <p:cNvSpPr txBox="1"/>
           <p:nvPr/>
         </p:nvSpPr>
@@ -12920,7 +13482,7 @@
       </p:sp>
       <p:sp>
         <p:nvSpPr>
-          <p:cNvPr id="242" name="TextBox 241"/>
+          <p:cNvPr id="277" name="TextBox 276"/>
           <p:cNvSpPr txBox="1"/>
           <p:nvPr/>
         </p:nvSpPr>
@@ -12962,7 +13524,7 @@
       </p:sp>
       <p:sp>
         <p:nvSpPr>
-          <p:cNvPr id="243" name="TextBox 242"/>
+          <p:cNvPr id="278" name="TextBox 277"/>
           <p:cNvSpPr txBox="1"/>
           <p:nvPr/>
         </p:nvSpPr>
@@ -13004,7 +13566,7 @@
       </p:sp>
       <p:sp>
         <p:nvSpPr>
-          <p:cNvPr id="244" name="TextBox 243"/>
+          <p:cNvPr id="279" name="TextBox 278"/>
           <p:cNvSpPr txBox="1"/>
           <p:nvPr/>
         </p:nvSpPr>
@@ -13046,7 +13608,7 @@
       </p:sp>
       <p:sp>
         <p:nvSpPr>
-          <p:cNvPr id="245" name="Rounded Rectangle 244"/>
+          <p:cNvPr id="280" name="Rounded Rectangle 279"/>
           <p:cNvSpPr/>
           <p:nvPr/>
         </p:nvSpPr>
@@ -13094,7 +13656,7 @@
       </p:sp>
       <p:sp>
         <p:nvSpPr>
-          <p:cNvPr id="246" name="TextBox 245"/>
+          <p:cNvPr id="281" name="TextBox 280"/>
           <p:cNvSpPr txBox="1"/>
           <p:nvPr/>
         </p:nvSpPr>
@@ -13136,7 +13698,7 @@
       </p:sp>
       <p:sp>
         <p:nvSpPr>
-          <p:cNvPr id="247" name="TextBox 246"/>
+          <p:cNvPr id="282" name="TextBox 281"/>
           <p:cNvSpPr txBox="1"/>
           <p:nvPr/>
         </p:nvSpPr>
@@ -13232,7 +13794,7 @@
       </p:sp>
       <p:sp>
         <p:nvSpPr>
-          <p:cNvPr id="248" name="Rounded Rectangle 247"/>
+          <p:cNvPr id="283" name="Rounded Rectangle 282"/>
           <p:cNvSpPr/>
           <p:nvPr/>
         </p:nvSpPr>
@@ -13280,7 +13842,7 @@
       </p:sp>
       <p:sp>
         <p:nvSpPr>
-          <p:cNvPr id="249" name="TextBox 248"/>
+          <p:cNvPr id="284" name="TextBox 283"/>
           <p:cNvSpPr txBox="1"/>
           <p:nvPr/>
         </p:nvSpPr>
@@ -13322,7 +13884,7 @@
       </p:sp>
       <p:sp>
         <p:nvSpPr>
-          <p:cNvPr id="250" name="TextBox 249"/>
+          <p:cNvPr id="285" name="TextBox 284"/>
           <p:cNvSpPr txBox="1"/>
           <p:nvPr/>
         </p:nvSpPr>
@@ -14160,7 +14722,289 @@
       </p:sp>
       <p:sp>
         <p:nvSpPr>
-          <p:cNvPr id="174" name="TextBox 173"/>
+          <p:cNvPr id="176" name="Rounded Rectangle 175"/>
+          <p:cNvSpPr/>
+          <p:nvPr/>
+        </p:nvSpPr>
+        <p:spPr>
+          <a:xfrm>
+            <a:off x="3218688" y="1298448"/>
+            <a:ext cx="2697480" cy="2743200"/>
+          </a:xfrm>
+          <a:prstGeom prst="roundRect">
+            <a:avLst>
+              <a:gd name="adj" fmla="val 4000"/>
+            </a:avLst>
+          </a:prstGeom>
+          <a:solidFill>
+            <a:srgbClr val="F8FAFC"/>
+          </a:solidFill>
+          <a:ln w="9525">
+            <a:solidFill>
+              <a:srgbClr val="E2E8F0"/>
+            </a:solidFill>
+          </a:ln>
+          <a:effectLst/>
+        </p:spPr>
+        <p:style>
+          <a:lnRef idx="1">
+            <a:schemeClr val="accent1"/>
+          </a:lnRef>
+          <a:fillRef idx="3">
+            <a:schemeClr val="accent1"/>
+          </a:fillRef>
+          <a:effectRef idx="2">
+            <a:schemeClr val="accent1"/>
+          </a:effectRef>
+          <a:fontRef idx="minor">
+            <a:schemeClr val="lt1"/>
+          </a:fontRef>
+        </p:style>
+        <p:txBody>
+          <a:bodyPr rtlCol="0" anchor="ctr"/>
+          <a:lstStyle/>
+          <a:p>
+            <a:pPr algn="ctr"/>
+          </a:p>
+        </p:txBody>
+      </p:sp>
+      <p:sp>
+        <p:nvSpPr>
+          <p:cNvPr id="177" name="Rounded Rectangle 176"/>
+          <p:cNvSpPr/>
+          <p:nvPr/>
+        </p:nvSpPr>
+        <p:spPr>
+          <a:xfrm>
+            <a:off x="3218688" y="1298448"/>
+            <a:ext cx="2697480" cy="54864"/>
+          </a:xfrm>
+          <a:prstGeom prst="roundRect">
+            <a:avLst>
+              <a:gd name="adj" fmla="val 30000"/>
+            </a:avLst>
+          </a:prstGeom>
+          <a:solidFill>
+            <a:srgbClr val="6366F1"/>
+          </a:solidFill>
+          <a:ln>
+            <a:noFill/>
+          </a:ln>
+          <a:effectLst/>
+        </p:spPr>
+        <p:style>
+          <a:lnRef idx="1">
+            <a:schemeClr val="accent1"/>
+          </a:lnRef>
+          <a:fillRef idx="3">
+            <a:schemeClr val="accent1"/>
+          </a:fillRef>
+          <a:effectRef idx="2">
+            <a:schemeClr val="accent1"/>
+          </a:effectRef>
+          <a:fontRef idx="minor">
+            <a:schemeClr val="lt1"/>
+          </a:fontRef>
+        </p:style>
+        <p:txBody>
+          <a:bodyPr rtlCol="0" anchor="ctr"/>
+          <a:lstStyle/>
+          <a:p>
+            <a:pPr algn="ctr"/>
+          </a:p>
+        </p:txBody>
+      </p:sp>
+      <p:sp>
+        <p:nvSpPr>
+          <p:cNvPr id="180" name="Rounded Rectangle 179"/>
+          <p:cNvSpPr/>
+          <p:nvPr/>
+        </p:nvSpPr>
+        <p:spPr>
+          <a:xfrm>
+            <a:off x="6053328" y="1298448"/>
+            <a:ext cx="2697480" cy="2743200"/>
+          </a:xfrm>
+          <a:prstGeom prst="roundRect">
+            <a:avLst>
+              <a:gd name="adj" fmla="val 4000"/>
+            </a:avLst>
+          </a:prstGeom>
+          <a:solidFill>
+            <a:srgbClr val="F8FAFC"/>
+          </a:solidFill>
+          <a:ln w="9525">
+            <a:solidFill>
+              <a:srgbClr val="E2E8F0"/>
+            </a:solidFill>
+          </a:ln>
+          <a:effectLst/>
+        </p:spPr>
+        <p:style>
+          <a:lnRef idx="1">
+            <a:schemeClr val="accent1"/>
+          </a:lnRef>
+          <a:fillRef idx="3">
+            <a:schemeClr val="accent1"/>
+          </a:fillRef>
+          <a:effectRef idx="2">
+            <a:schemeClr val="accent1"/>
+          </a:effectRef>
+          <a:fontRef idx="minor">
+            <a:schemeClr val="lt1"/>
+          </a:fontRef>
+        </p:style>
+        <p:txBody>
+          <a:bodyPr rtlCol="0" anchor="ctr"/>
+          <a:lstStyle/>
+          <a:p>
+            <a:pPr algn="ctr"/>
+          </a:p>
+        </p:txBody>
+      </p:sp>
+      <p:sp>
+        <p:nvSpPr>
+          <p:cNvPr id="181" name="Rounded Rectangle 180"/>
+          <p:cNvSpPr/>
+          <p:nvPr/>
+        </p:nvSpPr>
+        <p:spPr>
+          <a:xfrm>
+            <a:off x="6053328" y="1298448"/>
+            <a:ext cx="2697480" cy="54864"/>
+          </a:xfrm>
+          <a:prstGeom prst="roundRect">
+            <a:avLst>
+              <a:gd name="adj" fmla="val 30000"/>
+            </a:avLst>
+          </a:prstGeom>
+          <a:solidFill>
+            <a:srgbClr val="A5B0FF"/>
+          </a:solidFill>
+          <a:ln>
+            <a:noFill/>
+          </a:ln>
+          <a:effectLst/>
+        </p:spPr>
+        <p:style>
+          <a:lnRef idx="1">
+            <a:schemeClr val="accent1"/>
+          </a:lnRef>
+          <a:fillRef idx="3">
+            <a:schemeClr val="accent1"/>
+          </a:fillRef>
+          <a:effectRef idx="2">
+            <a:schemeClr val="accent1"/>
+          </a:effectRef>
+          <a:fontRef idx="minor">
+            <a:schemeClr val="lt1"/>
+          </a:fontRef>
+        </p:style>
+        <p:txBody>
+          <a:bodyPr rtlCol="0" anchor="ctr"/>
+          <a:lstStyle/>
+          <a:p>
+            <a:pPr algn="ctr"/>
+          </a:p>
+        </p:txBody>
+      </p:sp>
+      <p:sp>
+        <p:nvSpPr>
+          <p:cNvPr id="182" name="Rounded Rectangle 181"/>
+          <p:cNvSpPr/>
+          <p:nvPr/>
+        </p:nvSpPr>
+        <p:spPr>
+          <a:xfrm>
+            <a:off x="384048" y="1298448"/>
+            <a:ext cx="2697480" cy="2743200"/>
+          </a:xfrm>
+          <a:prstGeom prst="roundRect">
+            <a:avLst>
+              <a:gd name="adj" fmla="val 4000"/>
+            </a:avLst>
+          </a:prstGeom>
+          <a:solidFill>
+            <a:srgbClr val="F8FAFC"/>
+          </a:solidFill>
+          <a:ln w="9525">
+            <a:solidFill>
+              <a:srgbClr val="E2E8F0"/>
+            </a:solidFill>
+          </a:ln>
+          <a:effectLst/>
+        </p:spPr>
+        <p:style>
+          <a:lnRef idx="1">
+            <a:schemeClr val="accent1"/>
+          </a:lnRef>
+          <a:fillRef idx="3">
+            <a:schemeClr val="accent1"/>
+          </a:fillRef>
+          <a:effectRef idx="2">
+            <a:schemeClr val="accent1"/>
+          </a:effectRef>
+          <a:fontRef idx="minor">
+            <a:schemeClr val="lt1"/>
+          </a:fontRef>
+        </p:style>
+        <p:txBody>
+          <a:bodyPr rtlCol="0" anchor="ctr"/>
+          <a:lstStyle/>
+          <a:p>
+            <a:pPr algn="ctr"/>
+          </a:p>
+        </p:txBody>
+      </p:sp>
+      <p:sp>
+        <p:nvSpPr>
+          <p:cNvPr id="183" name="Rounded Rectangle 182"/>
+          <p:cNvSpPr/>
+          <p:nvPr/>
+        </p:nvSpPr>
+        <p:spPr>
+          <a:xfrm>
+            <a:off x="384048" y="1298448"/>
+            <a:ext cx="2697480" cy="54864"/>
+          </a:xfrm>
+          <a:prstGeom prst="roundRect">
+            <a:avLst>
+              <a:gd name="adj" fmla="val 30000"/>
+            </a:avLst>
+          </a:prstGeom>
+          <a:solidFill>
+            <a:srgbClr val="4F46E5"/>
+          </a:solidFill>
+          <a:ln>
+            <a:noFill/>
+          </a:ln>
+          <a:effectLst/>
+        </p:spPr>
+        <p:style>
+          <a:lnRef idx="1">
+            <a:schemeClr val="accent1"/>
+          </a:lnRef>
+          <a:fillRef idx="3">
+            <a:schemeClr val="accent1"/>
+          </a:fillRef>
+          <a:effectRef idx="2">
+            <a:schemeClr val="accent1"/>
+          </a:effectRef>
+          <a:fontRef idx="minor">
+            <a:schemeClr val="lt1"/>
+          </a:fontRef>
+        </p:style>
+        <p:txBody>
+          <a:bodyPr rtlCol="0" anchor="ctr"/>
+          <a:lstStyle/>
+          <a:p>
+            <a:pPr algn="ctr"/>
+          </a:p>
+        </p:txBody>
+      </p:sp>
+      <p:sp>
+        <p:nvSpPr>
+          <p:cNvPr id="184" name="TextBox 183"/>
           <p:cNvSpPr txBox="1"/>
           <p:nvPr/>
         </p:nvSpPr>
@@ -14202,7 +15046,7 @@
       </p:sp>
       <p:sp>
         <p:nvSpPr>
-          <p:cNvPr id="175" name="TextBox 174"/>
+          <p:cNvPr id="185" name="TextBox 184"/>
           <p:cNvSpPr txBox="1"/>
           <p:nvPr/>
         </p:nvSpPr>
@@ -14301,7 +15145,7 @@
       </p:sp>
       <p:sp>
         <p:nvSpPr>
-          <p:cNvPr id="176" name="Rounded Rectangle 175"/>
+          <p:cNvPr id="186" name="Rounded Rectangle 185"/>
           <p:cNvSpPr/>
           <p:nvPr/>
         </p:nvSpPr>
@@ -14349,7 +15193,7 @@
       </p:sp>
       <p:sp>
         <p:nvSpPr>
-          <p:cNvPr id="177" name="Rounded Rectangle 176"/>
+          <p:cNvPr id="187" name="Rounded Rectangle 186"/>
           <p:cNvSpPr/>
           <p:nvPr/>
         </p:nvSpPr>
@@ -14395,7 +15239,7 @@
       </p:sp>
       <p:sp>
         <p:nvSpPr>
-          <p:cNvPr id="178" name="TextBox 177"/>
+          <p:cNvPr id="188" name="TextBox 187"/>
           <p:cNvSpPr txBox="1"/>
           <p:nvPr/>
         </p:nvSpPr>
@@ -14437,7 +15281,7 @@
       </p:sp>
       <p:sp>
         <p:nvSpPr>
-          <p:cNvPr id="179" name="TextBox 178"/>
+          <p:cNvPr id="189" name="TextBox 188"/>
           <p:cNvSpPr txBox="1"/>
           <p:nvPr/>
         </p:nvSpPr>
@@ -14536,7 +15380,7 @@
       </p:sp>
       <p:sp>
         <p:nvSpPr>
-          <p:cNvPr id="180" name="Rounded Rectangle 179"/>
+          <p:cNvPr id="190" name="Rounded Rectangle 189"/>
           <p:cNvSpPr/>
           <p:nvPr/>
         </p:nvSpPr>
@@ -14584,7 +15428,7 @@
       </p:sp>
       <p:sp>
         <p:nvSpPr>
-          <p:cNvPr id="181" name="Rounded Rectangle 180"/>
+          <p:cNvPr id="191" name="Rounded Rectangle 190"/>
           <p:cNvSpPr/>
           <p:nvPr/>
         </p:nvSpPr>
@@ -14630,7 +15474,7 @@
       </p:sp>
       <p:sp>
         <p:nvSpPr>
-          <p:cNvPr id="182" name="TextBox 181"/>
+          <p:cNvPr id="192" name="TextBox 191"/>
           <p:cNvSpPr txBox="1"/>
           <p:nvPr/>
         </p:nvSpPr>
@@ -14672,7 +15516,7 @@
       </p:sp>
       <p:sp>
         <p:nvSpPr>
-          <p:cNvPr id="183" name="TextBox 182"/>
+          <p:cNvPr id="193" name="TextBox 192"/>
           <p:cNvSpPr txBox="1"/>
           <p:nvPr/>
         </p:nvSpPr>
@@ -14771,7 +15615,7 @@
       </p:sp>
       <p:sp>
         <p:nvSpPr>
-          <p:cNvPr id="184" name="TextBox 183"/>
+          <p:cNvPr id="194" name="TextBox 193"/>
           <p:cNvSpPr txBox="1"/>
           <p:nvPr/>
         </p:nvSpPr>
@@ -15282,7 +16126,7 @@
                 </a:solidFill>
                 <a:latin typeface="Google Sans Flex"/>
               </a:rPr>
-              <a:t>Assay — Rafida Aziz (lead), M. Zulfi Fahreza, Wildan Fajar Maulana.  </a:t>
+              <a:t>Nexatriv — Rafida Aziz (lead), M. Zulfi Fahreza, Wildan Fajar Maulana.  </a:t>
             </a:r>
             <a:r>
               <a:rPr sz="900" b="1">
@@ -15960,7 +16804,55 @@
       </p:sp>
       <p:sp>
         <p:nvSpPr>
-          <p:cNvPr id="78" name="TextBox 77"/>
+          <p:cNvPr id="80" name="Rounded Rectangle 79"/>
+          <p:cNvSpPr/>
+          <p:nvPr/>
+        </p:nvSpPr>
+        <p:spPr>
+          <a:xfrm>
+            <a:off x="5440680" y="1298448"/>
+            <a:ext cx="3246120" cy="3200400"/>
+          </a:xfrm>
+          <a:prstGeom prst="roundRect">
+            <a:avLst>
+              <a:gd name="adj" fmla="val 4000"/>
+            </a:avLst>
+          </a:prstGeom>
+          <a:solidFill>
+            <a:srgbClr val="F8FAFC"/>
+          </a:solidFill>
+          <a:ln w="9525">
+            <a:solidFill>
+              <a:srgbClr val="E2E8F0"/>
+            </a:solidFill>
+          </a:ln>
+          <a:effectLst/>
+        </p:spPr>
+        <p:style>
+          <a:lnRef idx="1">
+            <a:schemeClr val="accent1"/>
+          </a:lnRef>
+          <a:fillRef idx="3">
+            <a:schemeClr val="accent1"/>
+          </a:fillRef>
+          <a:effectRef idx="2">
+            <a:schemeClr val="accent1"/>
+          </a:effectRef>
+          <a:fontRef idx="minor">
+            <a:schemeClr val="lt1"/>
+          </a:fontRef>
+        </p:style>
+        <p:txBody>
+          <a:bodyPr rtlCol="0" anchor="ctr"/>
+          <a:lstStyle/>
+          <a:p>
+            <a:pPr algn="ctr"/>
+          </a:p>
+        </p:txBody>
+      </p:sp>
+      <p:sp>
+        <p:nvSpPr>
+          <p:cNvPr id="81" name="TextBox 80"/>
           <p:cNvSpPr txBox="1"/>
           <p:nvPr/>
         </p:nvSpPr>
@@ -16011,7 +16903,7 @@
       </p:sp>
       <p:sp>
         <p:nvSpPr>
-          <p:cNvPr id="79" name="TextBox 78"/>
+          <p:cNvPr id="82" name="TextBox 81"/>
           <p:cNvSpPr txBox="1"/>
           <p:nvPr/>
         </p:nvSpPr>
@@ -16118,7 +17010,7 @@
       </p:sp>
       <p:sp>
         <p:nvSpPr>
-          <p:cNvPr id="80" name="Rounded Rectangle 79"/>
+          <p:cNvPr id="83" name="Rounded Rectangle 82"/>
           <p:cNvSpPr/>
           <p:nvPr/>
         </p:nvSpPr>
@@ -16166,7 +17058,7 @@
       </p:sp>
       <p:sp>
         <p:nvSpPr>
-          <p:cNvPr id="81" name="TextBox 80"/>
+          <p:cNvPr id="84" name="TextBox 83"/>
           <p:cNvSpPr txBox="1"/>
           <p:nvPr/>
         </p:nvSpPr>
@@ -16208,7 +17100,7 @@
       </p:sp>
       <p:sp>
         <p:nvSpPr>
-          <p:cNvPr id="82" name="TextBox 81"/>
+          <p:cNvPr id="85" name="TextBox 84"/>
           <p:cNvSpPr txBox="1"/>
           <p:nvPr/>
         </p:nvSpPr>
@@ -16250,7 +17142,7 @@
       </p:sp>
       <p:sp>
         <p:nvSpPr>
-          <p:cNvPr id="83" name="TextBox 82"/>
+          <p:cNvPr id="86" name="TextBox 85"/>
           <p:cNvSpPr txBox="1"/>
           <p:nvPr/>
         </p:nvSpPr>
@@ -16292,7 +17184,7 @@
       </p:sp>
       <p:sp>
         <p:nvSpPr>
-          <p:cNvPr id="84" name="TextBox 83"/>
+          <p:cNvPr id="87" name="TextBox 86"/>
           <p:cNvSpPr txBox="1"/>
           <p:nvPr/>
         </p:nvSpPr>
@@ -16334,7 +17226,7 @@
       </p:sp>
       <p:sp>
         <p:nvSpPr>
-          <p:cNvPr id="85" name="TextBox 84"/>
+          <p:cNvPr id="88" name="TextBox 87"/>
           <p:cNvSpPr txBox="1"/>
           <p:nvPr/>
         </p:nvSpPr>
@@ -16376,7 +17268,7 @@
       </p:sp>
       <p:sp>
         <p:nvSpPr>
-          <p:cNvPr id="86" name="TextBox 85"/>
+          <p:cNvPr id="89" name="TextBox 88"/>
           <p:cNvSpPr txBox="1"/>
           <p:nvPr/>
         </p:nvSpPr>
@@ -16418,7 +17310,7 @@
       </p:sp>
       <p:sp>
         <p:nvSpPr>
-          <p:cNvPr id="87" name="TextBox 86"/>
+          <p:cNvPr id="90" name="TextBox 89"/>
           <p:cNvSpPr txBox="1"/>
           <p:nvPr/>
         </p:nvSpPr>
@@ -16460,7 +17352,7 @@
       </p:sp>
       <p:sp>
         <p:nvSpPr>
-          <p:cNvPr id="88" name="TextBox 87"/>
+          <p:cNvPr id="91" name="TextBox 90"/>
           <p:cNvSpPr txBox="1"/>
           <p:nvPr/>
         </p:nvSpPr>
@@ -16502,7 +17394,7 @@
       </p:sp>
       <p:sp>
         <p:nvSpPr>
-          <p:cNvPr id="89" name="TextBox 88"/>
+          <p:cNvPr id="92" name="TextBox 91"/>
           <p:cNvSpPr txBox="1"/>
           <p:nvPr/>
         </p:nvSpPr>
@@ -16544,7 +17436,7 @@
       </p:sp>
       <p:sp>
         <p:nvSpPr>
-          <p:cNvPr id="90" name="TextBox 89"/>
+          <p:cNvPr id="93" name="TextBox 92"/>
           <p:cNvSpPr txBox="1"/>
           <p:nvPr/>
         </p:nvSpPr>
@@ -16586,7 +17478,7 @@
       </p:sp>
       <p:sp>
         <p:nvSpPr>
-          <p:cNvPr id="91" name="TextBox 90"/>
+          <p:cNvPr id="94" name="TextBox 93"/>
           <p:cNvSpPr txBox="1"/>
           <p:nvPr/>
         </p:nvSpPr>
@@ -16628,7 +17520,7 @@
       </p:sp>
       <p:sp>
         <p:nvSpPr>
-          <p:cNvPr id="92" name="TextBox 91"/>
+          <p:cNvPr id="95" name="TextBox 94"/>
           <p:cNvSpPr txBox="1"/>
           <p:nvPr/>
         </p:nvSpPr>
@@ -16670,7 +17562,7 @@
       </p:sp>
       <p:sp>
         <p:nvSpPr>
-          <p:cNvPr id="93" name="TextBox 92"/>
+          <p:cNvPr id="96" name="TextBox 95"/>
           <p:cNvSpPr txBox="1"/>
           <p:nvPr/>
         </p:nvSpPr>
@@ -16712,7 +17604,7 @@
       </p:sp>
       <p:sp>
         <p:nvSpPr>
-          <p:cNvPr id="94" name="TextBox 93"/>
+          <p:cNvPr id="97" name="TextBox 96"/>
           <p:cNvSpPr txBox="1"/>
           <p:nvPr/>
         </p:nvSpPr>
@@ -16754,7 +17646,7 @@
       </p:sp>
       <p:sp>
         <p:nvSpPr>
-          <p:cNvPr id="95" name="TextBox 94"/>
+          <p:cNvPr id="98" name="TextBox 97"/>
           <p:cNvSpPr txBox="1"/>
           <p:nvPr/>
         </p:nvSpPr>
@@ -16796,7 +17688,7 @@
       </p:sp>
       <p:sp>
         <p:nvSpPr>
-          <p:cNvPr id="96" name="TextBox 95"/>
+          <p:cNvPr id="99" name="TextBox 98"/>
           <p:cNvSpPr txBox="1"/>
           <p:nvPr/>
         </p:nvSpPr>
@@ -17244,7 +18136,99 @@
       </p:sp>
       <p:sp>
         <p:nvSpPr>
-          <p:cNvPr id="89" name="TextBox 88"/>
+          <p:cNvPr id="91" name="Rounded Rectangle 90"/>
+          <p:cNvSpPr/>
+          <p:nvPr/>
+        </p:nvSpPr>
+        <p:spPr>
+          <a:xfrm>
+            <a:off x="4700016" y="1325880"/>
+            <a:ext cx="4069080" cy="1783080"/>
+          </a:xfrm>
+          <a:prstGeom prst="roundRect">
+            <a:avLst>
+              <a:gd name="adj" fmla="val 4000"/>
+            </a:avLst>
+          </a:prstGeom>
+          <a:solidFill>
+            <a:srgbClr val="EEF0FF"/>
+          </a:solidFill>
+          <a:ln>
+            <a:noFill/>
+          </a:ln>
+          <a:effectLst/>
+        </p:spPr>
+        <p:style>
+          <a:lnRef idx="1">
+            <a:schemeClr val="accent1"/>
+          </a:lnRef>
+          <a:fillRef idx="3">
+            <a:schemeClr val="accent1"/>
+          </a:fillRef>
+          <a:effectRef idx="2">
+            <a:schemeClr val="accent1"/>
+          </a:effectRef>
+          <a:fontRef idx="minor">
+            <a:schemeClr val="lt1"/>
+          </a:fontRef>
+        </p:style>
+        <p:txBody>
+          <a:bodyPr rtlCol="0" anchor="ctr"/>
+          <a:lstStyle/>
+          <a:p>
+            <a:pPr algn="ctr"/>
+          </a:p>
+        </p:txBody>
+      </p:sp>
+      <p:sp>
+        <p:nvSpPr>
+          <p:cNvPr id="92" name="Rounded Rectangle 91"/>
+          <p:cNvSpPr/>
+          <p:nvPr/>
+        </p:nvSpPr>
+        <p:spPr>
+          <a:xfrm>
+            <a:off x="384048" y="1325880"/>
+            <a:ext cx="4069080" cy="1783080"/>
+          </a:xfrm>
+          <a:prstGeom prst="roundRect">
+            <a:avLst>
+              <a:gd name="adj" fmla="val 4000"/>
+            </a:avLst>
+          </a:prstGeom>
+          <a:solidFill>
+            <a:srgbClr val="F8FAFC"/>
+          </a:solidFill>
+          <a:ln>
+            <a:noFill/>
+          </a:ln>
+          <a:effectLst/>
+        </p:spPr>
+        <p:style>
+          <a:lnRef idx="1">
+            <a:schemeClr val="accent1"/>
+          </a:lnRef>
+          <a:fillRef idx="3">
+            <a:schemeClr val="accent1"/>
+          </a:fillRef>
+          <a:effectRef idx="2">
+            <a:schemeClr val="accent1"/>
+          </a:effectRef>
+          <a:fontRef idx="minor">
+            <a:schemeClr val="lt1"/>
+          </a:fontRef>
+        </p:style>
+        <p:txBody>
+          <a:bodyPr rtlCol="0" anchor="ctr"/>
+          <a:lstStyle/>
+          <a:p>
+            <a:pPr algn="ctr"/>
+          </a:p>
+        </p:txBody>
+      </p:sp>
+      <p:sp>
+        <p:nvSpPr>
+          <p:cNvPr id="93" name="TextBox 92"/>
           <p:cNvSpPr txBox="1"/>
           <p:nvPr/>
         </p:nvSpPr>
@@ -17295,7 +18279,7 @@
       </p:sp>
       <p:sp>
         <p:nvSpPr>
-          <p:cNvPr id="90" name="TextBox 89"/>
+          <p:cNvPr id="94" name="TextBox 93"/>
           <p:cNvSpPr txBox="1"/>
           <p:nvPr/>
         </p:nvSpPr>
@@ -17394,7 +18378,7 @@
       </p:sp>
       <p:sp>
         <p:nvSpPr>
-          <p:cNvPr id="91" name="Rounded Rectangle 90"/>
+          <p:cNvPr id="95" name="Rounded Rectangle 94"/>
           <p:cNvSpPr/>
           <p:nvPr/>
         </p:nvSpPr>
@@ -17440,7 +18424,7 @@
       </p:sp>
       <p:sp>
         <p:nvSpPr>
-          <p:cNvPr id="92" name="TextBox 91"/>
+          <p:cNvPr id="96" name="TextBox 95"/>
           <p:cNvSpPr txBox="1"/>
           <p:nvPr/>
         </p:nvSpPr>
@@ -17491,7 +18475,7 @@
       </p:sp>
       <p:sp>
         <p:nvSpPr>
-          <p:cNvPr id="93" name="TextBox 92"/>
+          <p:cNvPr id="97" name="TextBox 96"/>
           <p:cNvSpPr txBox="1"/>
           <p:nvPr/>
         </p:nvSpPr>
@@ -17590,7 +18574,7 @@
       </p:sp>
       <p:sp>
         <p:nvSpPr>
-          <p:cNvPr id="94" name="TextBox 93"/>
+          <p:cNvPr id="98" name="TextBox 97"/>
           <p:cNvSpPr txBox="1"/>
           <p:nvPr/>
         </p:nvSpPr>
@@ -17632,7 +18616,7 @@
       </p:sp>
       <p:sp>
         <p:nvSpPr>
-          <p:cNvPr id="95" name="TextBox 94"/>
+          <p:cNvPr id="99" name="TextBox 98"/>
           <p:cNvSpPr txBox="1"/>
           <p:nvPr/>
         </p:nvSpPr>
@@ -19474,7 +20458,759 @@
       </p:sp>
       <p:sp>
         <p:nvSpPr>
-          <p:cNvPr id="150" name="TextBox 149"/>
+          <p:cNvPr id="152" name="Rounded Rectangle 151"/>
+          <p:cNvSpPr/>
+          <p:nvPr/>
+        </p:nvSpPr>
+        <p:spPr>
+          <a:xfrm>
+            <a:off x="4700016" y="1298448"/>
+            <a:ext cx="4041648" cy="841248"/>
+          </a:xfrm>
+          <a:prstGeom prst="roundRect">
+            <a:avLst>
+              <a:gd name="adj" fmla="val 4000"/>
+            </a:avLst>
+          </a:prstGeom>
+          <a:solidFill>
+            <a:srgbClr val="F8FAFC"/>
+          </a:solidFill>
+          <a:ln w="9525">
+            <a:solidFill>
+              <a:srgbClr val="E2E8F0"/>
+            </a:solidFill>
+          </a:ln>
+          <a:effectLst/>
+        </p:spPr>
+        <p:style>
+          <a:lnRef idx="1">
+            <a:schemeClr val="accent1"/>
+          </a:lnRef>
+          <a:fillRef idx="3">
+            <a:schemeClr val="accent1"/>
+          </a:fillRef>
+          <a:effectRef idx="2">
+            <a:schemeClr val="accent1"/>
+          </a:effectRef>
+          <a:fontRef idx="minor">
+            <a:schemeClr val="lt1"/>
+          </a:fontRef>
+        </p:style>
+        <p:txBody>
+          <a:bodyPr rtlCol="0" anchor="ctr"/>
+          <a:lstStyle/>
+          <a:p>
+            <a:pPr algn="ctr"/>
+          </a:p>
+        </p:txBody>
+      </p:sp>
+      <p:sp>
+        <p:nvSpPr>
+          <p:cNvPr id="153" name="Rounded Rectangle 152"/>
+          <p:cNvSpPr/>
+          <p:nvPr/>
+        </p:nvSpPr>
+        <p:spPr>
+          <a:xfrm>
+            <a:off x="4700016" y="1426464"/>
+            <a:ext cx="45720" cy="566928"/>
+          </a:xfrm>
+          <a:prstGeom prst="roundRect">
+            <a:avLst>
+              <a:gd name="adj" fmla="val 50000"/>
+            </a:avLst>
+          </a:prstGeom>
+          <a:solidFill>
+            <a:srgbClr val="4F46E5"/>
+          </a:solidFill>
+          <a:ln>
+            <a:noFill/>
+          </a:ln>
+          <a:effectLst/>
+        </p:spPr>
+        <p:style>
+          <a:lnRef idx="1">
+            <a:schemeClr val="accent1"/>
+          </a:lnRef>
+          <a:fillRef idx="3">
+            <a:schemeClr val="accent1"/>
+          </a:fillRef>
+          <a:effectRef idx="2">
+            <a:schemeClr val="accent1"/>
+          </a:effectRef>
+          <a:fontRef idx="minor">
+            <a:schemeClr val="lt1"/>
+          </a:fontRef>
+        </p:style>
+        <p:txBody>
+          <a:bodyPr rtlCol="0" anchor="ctr"/>
+          <a:lstStyle/>
+          <a:p>
+            <a:pPr algn="ctr"/>
+          </a:p>
+        </p:txBody>
+      </p:sp>
+      <p:sp>
+        <p:nvSpPr>
+          <p:cNvPr id="156" name="Rounded Rectangle 155"/>
+          <p:cNvSpPr/>
+          <p:nvPr/>
+        </p:nvSpPr>
+        <p:spPr>
+          <a:xfrm>
+            <a:off x="384048" y="2267712"/>
+            <a:ext cx="4041648" cy="841248"/>
+          </a:xfrm>
+          <a:prstGeom prst="roundRect">
+            <a:avLst>
+              <a:gd name="adj" fmla="val 4000"/>
+            </a:avLst>
+          </a:prstGeom>
+          <a:solidFill>
+            <a:srgbClr val="F8FAFC"/>
+          </a:solidFill>
+          <a:ln w="9525">
+            <a:solidFill>
+              <a:srgbClr val="E2E8F0"/>
+            </a:solidFill>
+          </a:ln>
+          <a:effectLst/>
+        </p:spPr>
+        <p:style>
+          <a:lnRef idx="1">
+            <a:schemeClr val="accent1"/>
+          </a:lnRef>
+          <a:fillRef idx="3">
+            <a:schemeClr val="accent1"/>
+          </a:fillRef>
+          <a:effectRef idx="2">
+            <a:schemeClr val="accent1"/>
+          </a:effectRef>
+          <a:fontRef idx="minor">
+            <a:schemeClr val="lt1"/>
+          </a:fontRef>
+        </p:style>
+        <p:txBody>
+          <a:bodyPr rtlCol="0" anchor="ctr"/>
+          <a:lstStyle/>
+          <a:p>
+            <a:pPr algn="ctr"/>
+          </a:p>
+        </p:txBody>
+      </p:sp>
+      <p:sp>
+        <p:nvSpPr>
+          <p:cNvPr id="157" name="Rounded Rectangle 156"/>
+          <p:cNvSpPr/>
+          <p:nvPr/>
+        </p:nvSpPr>
+        <p:spPr>
+          <a:xfrm>
+            <a:off x="384048" y="2395728"/>
+            <a:ext cx="45720" cy="566928"/>
+          </a:xfrm>
+          <a:prstGeom prst="roundRect">
+            <a:avLst>
+              <a:gd name="adj" fmla="val 50000"/>
+            </a:avLst>
+          </a:prstGeom>
+          <a:solidFill>
+            <a:srgbClr val="4F46E5"/>
+          </a:solidFill>
+          <a:ln>
+            <a:noFill/>
+          </a:ln>
+          <a:effectLst/>
+        </p:spPr>
+        <p:style>
+          <a:lnRef idx="1">
+            <a:schemeClr val="accent1"/>
+          </a:lnRef>
+          <a:fillRef idx="3">
+            <a:schemeClr val="accent1"/>
+          </a:fillRef>
+          <a:effectRef idx="2">
+            <a:schemeClr val="accent1"/>
+          </a:effectRef>
+          <a:fontRef idx="minor">
+            <a:schemeClr val="lt1"/>
+          </a:fontRef>
+        </p:style>
+        <p:txBody>
+          <a:bodyPr rtlCol="0" anchor="ctr"/>
+          <a:lstStyle/>
+          <a:p>
+            <a:pPr algn="ctr"/>
+          </a:p>
+        </p:txBody>
+      </p:sp>
+      <p:sp>
+        <p:nvSpPr>
+          <p:cNvPr id="160" name="Rounded Rectangle 159"/>
+          <p:cNvSpPr/>
+          <p:nvPr/>
+        </p:nvSpPr>
+        <p:spPr>
+          <a:xfrm>
+            <a:off x="4700016" y="2267712"/>
+            <a:ext cx="4041648" cy="841248"/>
+          </a:xfrm>
+          <a:prstGeom prst="roundRect">
+            <a:avLst>
+              <a:gd name="adj" fmla="val 4000"/>
+            </a:avLst>
+          </a:prstGeom>
+          <a:solidFill>
+            <a:srgbClr val="F8FAFC"/>
+          </a:solidFill>
+          <a:ln w="9525">
+            <a:solidFill>
+              <a:srgbClr val="E2E8F0"/>
+            </a:solidFill>
+          </a:ln>
+          <a:effectLst/>
+        </p:spPr>
+        <p:style>
+          <a:lnRef idx="1">
+            <a:schemeClr val="accent1"/>
+          </a:lnRef>
+          <a:fillRef idx="3">
+            <a:schemeClr val="accent1"/>
+          </a:fillRef>
+          <a:effectRef idx="2">
+            <a:schemeClr val="accent1"/>
+          </a:effectRef>
+          <a:fontRef idx="minor">
+            <a:schemeClr val="lt1"/>
+          </a:fontRef>
+        </p:style>
+        <p:txBody>
+          <a:bodyPr rtlCol="0" anchor="ctr"/>
+          <a:lstStyle/>
+          <a:p>
+            <a:pPr algn="ctr"/>
+          </a:p>
+        </p:txBody>
+      </p:sp>
+      <p:sp>
+        <p:nvSpPr>
+          <p:cNvPr id="161" name="Rounded Rectangle 160"/>
+          <p:cNvSpPr/>
+          <p:nvPr/>
+        </p:nvSpPr>
+        <p:spPr>
+          <a:xfrm>
+            <a:off x="4700016" y="2395728"/>
+            <a:ext cx="45720" cy="566928"/>
+          </a:xfrm>
+          <a:prstGeom prst="roundRect">
+            <a:avLst>
+              <a:gd name="adj" fmla="val 50000"/>
+            </a:avLst>
+          </a:prstGeom>
+          <a:solidFill>
+            <a:srgbClr val="4F46E5"/>
+          </a:solidFill>
+          <a:ln>
+            <a:noFill/>
+          </a:ln>
+          <a:effectLst/>
+        </p:spPr>
+        <p:style>
+          <a:lnRef idx="1">
+            <a:schemeClr val="accent1"/>
+          </a:lnRef>
+          <a:fillRef idx="3">
+            <a:schemeClr val="accent1"/>
+          </a:fillRef>
+          <a:effectRef idx="2">
+            <a:schemeClr val="accent1"/>
+          </a:effectRef>
+          <a:fontRef idx="minor">
+            <a:schemeClr val="lt1"/>
+          </a:fontRef>
+        </p:style>
+        <p:txBody>
+          <a:bodyPr rtlCol="0" anchor="ctr"/>
+          <a:lstStyle/>
+          <a:p>
+            <a:pPr algn="ctr"/>
+          </a:p>
+        </p:txBody>
+      </p:sp>
+      <p:sp>
+        <p:nvSpPr>
+          <p:cNvPr id="164" name="Rounded Rectangle 163"/>
+          <p:cNvSpPr/>
+          <p:nvPr/>
+        </p:nvSpPr>
+        <p:spPr>
+          <a:xfrm>
+            <a:off x="384048" y="3236976"/>
+            <a:ext cx="4041648" cy="841248"/>
+          </a:xfrm>
+          <a:prstGeom prst="roundRect">
+            <a:avLst>
+              <a:gd name="adj" fmla="val 4000"/>
+            </a:avLst>
+          </a:prstGeom>
+          <a:solidFill>
+            <a:srgbClr val="F8FAFC"/>
+          </a:solidFill>
+          <a:ln w="9525">
+            <a:solidFill>
+              <a:srgbClr val="E2E8F0"/>
+            </a:solidFill>
+          </a:ln>
+          <a:effectLst/>
+        </p:spPr>
+        <p:style>
+          <a:lnRef idx="1">
+            <a:schemeClr val="accent1"/>
+          </a:lnRef>
+          <a:fillRef idx="3">
+            <a:schemeClr val="accent1"/>
+          </a:fillRef>
+          <a:effectRef idx="2">
+            <a:schemeClr val="accent1"/>
+          </a:effectRef>
+          <a:fontRef idx="minor">
+            <a:schemeClr val="lt1"/>
+          </a:fontRef>
+        </p:style>
+        <p:txBody>
+          <a:bodyPr rtlCol="0" anchor="ctr"/>
+          <a:lstStyle/>
+          <a:p>
+            <a:pPr algn="ctr"/>
+          </a:p>
+        </p:txBody>
+      </p:sp>
+      <p:sp>
+        <p:nvSpPr>
+          <p:cNvPr id="165" name="Rounded Rectangle 164"/>
+          <p:cNvSpPr/>
+          <p:nvPr/>
+        </p:nvSpPr>
+        <p:spPr>
+          <a:xfrm>
+            <a:off x="384048" y="3364992"/>
+            <a:ext cx="45720" cy="566928"/>
+          </a:xfrm>
+          <a:prstGeom prst="roundRect">
+            <a:avLst>
+              <a:gd name="adj" fmla="val 50000"/>
+            </a:avLst>
+          </a:prstGeom>
+          <a:solidFill>
+            <a:srgbClr val="4F46E5"/>
+          </a:solidFill>
+          <a:ln>
+            <a:noFill/>
+          </a:ln>
+          <a:effectLst/>
+        </p:spPr>
+        <p:style>
+          <a:lnRef idx="1">
+            <a:schemeClr val="accent1"/>
+          </a:lnRef>
+          <a:fillRef idx="3">
+            <a:schemeClr val="accent1"/>
+          </a:fillRef>
+          <a:effectRef idx="2">
+            <a:schemeClr val="accent1"/>
+          </a:effectRef>
+          <a:fontRef idx="minor">
+            <a:schemeClr val="lt1"/>
+          </a:fontRef>
+        </p:style>
+        <p:txBody>
+          <a:bodyPr rtlCol="0" anchor="ctr"/>
+          <a:lstStyle/>
+          <a:p>
+            <a:pPr algn="ctr"/>
+          </a:p>
+        </p:txBody>
+      </p:sp>
+      <p:sp>
+        <p:nvSpPr>
+          <p:cNvPr id="168" name="Rounded Rectangle 167"/>
+          <p:cNvSpPr/>
+          <p:nvPr/>
+        </p:nvSpPr>
+        <p:spPr>
+          <a:xfrm>
+            <a:off x="4700016" y="3236976"/>
+            <a:ext cx="4041648" cy="841248"/>
+          </a:xfrm>
+          <a:prstGeom prst="roundRect">
+            <a:avLst>
+              <a:gd name="adj" fmla="val 4000"/>
+            </a:avLst>
+          </a:prstGeom>
+          <a:solidFill>
+            <a:srgbClr val="F8FAFC"/>
+          </a:solidFill>
+          <a:ln w="9525">
+            <a:solidFill>
+              <a:srgbClr val="E2E8F0"/>
+            </a:solidFill>
+          </a:ln>
+          <a:effectLst/>
+        </p:spPr>
+        <p:style>
+          <a:lnRef idx="1">
+            <a:schemeClr val="accent1"/>
+          </a:lnRef>
+          <a:fillRef idx="3">
+            <a:schemeClr val="accent1"/>
+          </a:fillRef>
+          <a:effectRef idx="2">
+            <a:schemeClr val="accent1"/>
+          </a:effectRef>
+          <a:fontRef idx="minor">
+            <a:schemeClr val="lt1"/>
+          </a:fontRef>
+        </p:style>
+        <p:txBody>
+          <a:bodyPr rtlCol="0" anchor="ctr"/>
+          <a:lstStyle/>
+          <a:p>
+            <a:pPr algn="ctr"/>
+          </a:p>
+        </p:txBody>
+      </p:sp>
+      <p:sp>
+        <p:nvSpPr>
+          <p:cNvPr id="169" name="Rounded Rectangle 168"/>
+          <p:cNvSpPr/>
+          <p:nvPr/>
+        </p:nvSpPr>
+        <p:spPr>
+          <a:xfrm>
+            <a:off x="4700016" y="3364992"/>
+            <a:ext cx="45720" cy="566928"/>
+          </a:xfrm>
+          <a:prstGeom prst="roundRect">
+            <a:avLst>
+              <a:gd name="adj" fmla="val 50000"/>
+            </a:avLst>
+          </a:prstGeom>
+          <a:solidFill>
+            <a:srgbClr val="4F46E5"/>
+          </a:solidFill>
+          <a:ln>
+            <a:noFill/>
+          </a:ln>
+          <a:effectLst/>
+        </p:spPr>
+        <p:style>
+          <a:lnRef idx="1">
+            <a:schemeClr val="accent1"/>
+          </a:lnRef>
+          <a:fillRef idx="3">
+            <a:schemeClr val="accent1"/>
+          </a:fillRef>
+          <a:effectRef idx="2">
+            <a:schemeClr val="accent1"/>
+          </a:effectRef>
+          <a:fontRef idx="minor">
+            <a:schemeClr val="lt1"/>
+          </a:fontRef>
+        </p:style>
+        <p:txBody>
+          <a:bodyPr rtlCol="0" anchor="ctr"/>
+          <a:lstStyle/>
+          <a:p>
+            <a:pPr algn="ctr"/>
+          </a:p>
+        </p:txBody>
+      </p:sp>
+      <p:sp>
+        <p:nvSpPr>
+          <p:cNvPr id="172" name="Rounded Rectangle 171"/>
+          <p:cNvSpPr/>
+          <p:nvPr/>
+        </p:nvSpPr>
+        <p:spPr>
+          <a:xfrm>
+            <a:off x="384048" y="4206240"/>
+            <a:ext cx="4041648" cy="841248"/>
+          </a:xfrm>
+          <a:prstGeom prst="roundRect">
+            <a:avLst>
+              <a:gd name="adj" fmla="val 4000"/>
+            </a:avLst>
+          </a:prstGeom>
+          <a:solidFill>
+            <a:srgbClr val="F8FAFC"/>
+          </a:solidFill>
+          <a:ln w="9525">
+            <a:solidFill>
+              <a:srgbClr val="E2E8F0"/>
+            </a:solidFill>
+          </a:ln>
+          <a:effectLst/>
+        </p:spPr>
+        <p:style>
+          <a:lnRef idx="1">
+            <a:schemeClr val="accent1"/>
+          </a:lnRef>
+          <a:fillRef idx="3">
+            <a:schemeClr val="accent1"/>
+          </a:fillRef>
+          <a:effectRef idx="2">
+            <a:schemeClr val="accent1"/>
+          </a:effectRef>
+          <a:fontRef idx="minor">
+            <a:schemeClr val="lt1"/>
+          </a:fontRef>
+        </p:style>
+        <p:txBody>
+          <a:bodyPr rtlCol="0" anchor="ctr"/>
+          <a:lstStyle/>
+          <a:p>
+            <a:pPr algn="ctr"/>
+          </a:p>
+        </p:txBody>
+      </p:sp>
+      <p:sp>
+        <p:nvSpPr>
+          <p:cNvPr id="173" name="Rounded Rectangle 172"/>
+          <p:cNvSpPr/>
+          <p:nvPr/>
+        </p:nvSpPr>
+        <p:spPr>
+          <a:xfrm>
+            <a:off x="384048" y="4334256"/>
+            <a:ext cx="45720" cy="566928"/>
+          </a:xfrm>
+          <a:prstGeom prst="roundRect">
+            <a:avLst>
+              <a:gd name="adj" fmla="val 50000"/>
+            </a:avLst>
+          </a:prstGeom>
+          <a:solidFill>
+            <a:srgbClr val="4F46E5"/>
+          </a:solidFill>
+          <a:ln>
+            <a:noFill/>
+          </a:ln>
+          <a:effectLst/>
+        </p:spPr>
+        <p:style>
+          <a:lnRef idx="1">
+            <a:schemeClr val="accent1"/>
+          </a:lnRef>
+          <a:fillRef idx="3">
+            <a:schemeClr val="accent1"/>
+          </a:fillRef>
+          <a:effectRef idx="2">
+            <a:schemeClr val="accent1"/>
+          </a:effectRef>
+          <a:fontRef idx="minor">
+            <a:schemeClr val="lt1"/>
+          </a:fontRef>
+        </p:style>
+        <p:txBody>
+          <a:bodyPr rtlCol="0" anchor="ctr"/>
+          <a:lstStyle/>
+          <a:p>
+            <a:pPr algn="ctr"/>
+          </a:p>
+        </p:txBody>
+      </p:sp>
+      <p:sp>
+        <p:nvSpPr>
+          <p:cNvPr id="176" name="Rounded Rectangle 175"/>
+          <p:cNvSpPr/>
+          <p:nvPr/>
+        </p:nvSpPr>
+        <p:spPr>
+          <a:xfrm>
+            <a:off x="4700016" y="4206240"/>
+            <a:ext cx="4041648" cy="841248"/>
+          </a:xfrm>
+          <a:prstGeom prst="roundRect">
+            <a:avLst>
+              <a:gd name="adj" fmla="val 4000"/>
+            </a:avLst>
+          </a:prstGeom>
+          <a:solidFill>
+            <a:srgbClr val="F8FAFC"/>
+          </a:solidFill>
+          <a:ln w="9525">
+            <a:solidFill>
+              <a:srgbClr val="E2E8F0"/>
+            </a:solidFill>
+          </a:ln>
+          <a:effectLst/>
+        </p:spPr>
+        <p:style>
+          <a:lnRef idx="1">
+            <a:schemeClr val="accent1"/>
+          </a:lnRef>
+          <a:fillRef idx="3">
+            <a:schemeClr val="accent1"/>
+          </a:fillRef>
+          <a:effectRef idx="2">
+            <a:schemeClr val="accent1"/>
+          </a:effectRef>
+          <a:fontRef idx="minor">
+            <a:schemeClr val="lt1"/>
+          </a:fontRef>
+        </p:style>
+        <p:txBody>
+          <a:bodyPr rtlCol="0" anchor="ctr"/>
+          <a:lstStyle/>
+          <a:p>
+            <a:pPr algn="ctr"/>
+          </a:p>
+        </p:txBody>
+      </p:sp>
+      <p:sp>
+        <p:nvSpPr>
+          <p:cNvPr id="177" name="Rounded Rectangle 176"/>
+          <p:cNvSpPr/>
+          <p:nvPr/>
+        </p:nvSpPr>
+        <p:spPr>
+          <a:xfrm>
+            <a:off x="4700016" y="4334256"/>
+            <a:ext cx="45720" cy="566928"/>
+          </a:xfrm>
+          <a:prstGeom prst="roundRect">
+            <a:avLst>
+              <a:gd name="adj" fmla="val 50000"/>
+            </a:avLst>
+          </a:prstGeom>
+          <a:solidFill>
+            <a:srgbClr val="4F46E5"/>
+          </a:solidFill>
+          <a:ln>
+            <a:noFill/>
+          </a:ln>
+          <a:effectLst/>
+        </p:spPr>
+        <p:style>
+          <a:lnRef idx="1">
+            <a:schemeClr val="accent1"/>
+          </a:lnRef>
+          <a:fillRef idx="3">
+            <a:schemeClr val="accent1"/>
+          </a:fillRef>
+          <a:effectRef idx="2">
+            <a:schemeClr val="accent1"/>
+          </a:effectRef>
+          <a:fontRef idx="minor">
+            <a:schemeClr val="lt1"/>
+          </a:fontRef>
+        </p:style>
+        <p:txBody>
+          <a:bodyPr rtlCol="0" anchor="ctr"/>
+          <a:lstStyle/>
+          <a:p>
+            <a:pPr algn="ctr"/>
+          </a:p>
+        </p:txBody>
+      </p:sp>
+      <p:sp>
+        <p:nvSpPr>
+          <p:cNvPr id="178" name="Rounded Rectangle 177"/>
+          <p:cNvSpPr/>
+          <p:nvPr/>
+        </p:nvSpPr>
+        <p:spPr>
+          <a:xfrm>
+            <a:off x="384048" y="1298448"/>
+            <a:ext cx="4041648" cy="841248"/>
+          </a:xfrm>
+          <a:prstGeom prst="roundRect">
+            <a:avLst>
+              <a:gd name="adj" fmla="val 4000"/>
+            </a:avLst>
+          </a:prstGeom>
+          <a:solidFill>
+            <a:srgbClr val="F8FAFC"/>
+          </a:solidFill>
+          <a:ln w="9525">
+            <a:solidFill>
+              <a:srgbClr val="E2E8F0"/>
+            </a:solidFill>
+          </a:ln>
+          <a:effectLst/>
+        </p:spPr>
+        <p:style>
+          <a:lnRef idx="1">
+            <a:schemeClr val="accent1"/>
+          </a:lnRef>
+          <a:fillRef idx="3">
+            <a:schemeClr val="accent1"/>
+          </a:fillRef>
+          <a:effectRef idx="2">
+            <a:schemeClr val="accent1"/>
+          </a:effectRef>
+          <a:fontRef idx="minor">
+            <a:schemeClr val="lt1"/>
+          </a:fontRef>
+        </p:style>
+        <p:txBody>
+          <a:bodyPr rtlCol="0" anchor="ctr"/>
+          <a:lstStyle/>
+          <a:p>
+            <a:pPr algn="ctr"/>
+          </a:p>
+        </p:txBody>
+      </p:sp>
+      <p:sp>
+        <p:nvSpPr>
+          <p:cNvPr id="179" name="Rounded Rectangle 178"/>
+          <p:cNvSpPr/>
+          <p:nvPr/>
+        </p:nvSpPr>
+        <p:spPr>
+          <a:xfrm>
+            <a:off x="384048" y="1426464"/>
+            <a:ext cx="45720" cy="566928"/>
+          </a:xfrm>
+          <a:prstGeom prst="roundRect">
+            <a:avLst>
+              <a:gd name="adj" fmla="val 50000"/>
+            </a:avLst>
+          </a:prstGeom>
+          <a:solidFill>
+            <a:srgbClr val="4F46E5"/>
+          </a:solidFill>
+          <a:ln>
+            <a:noFill/>
+          </a:ln>
+          <a:effectLst/>
+        </p:spPr>
+        <p:style>
+          <a:lnRef idx="1">
+            <a:schemeClr val="accent1"/>
+          </a:lnRef>
+          <a:fillRef idx="3">
+            <a:schemeClr val="accent1"/>
+          </a:fillRef>
+          <a:effectRef idx="2">
+            <a:schemeClr val="accent1"/>
+          </a:effectRef>
+          <a:fontRef idx="minor">
+            <a:schemeClr val="lt1"/>
+          </a:fontRef>
+        </p:style>
+        <p:txBody>
+          <a:bodyPr rtlCol="0" anchor="ctr"/>
+          <a:lstStyle/>
+          <a:p>
+            <a:pPr algn="ctr"/>
+          </a:p>
+        </p:txBody>
+      </p:sp>
+      <p:sp>
+        <p:nvSpPr>
+          <p:cNvPr id="180" name="TextBox 179"/>
           <p:cNvSpPr txBox="1"/>
           <p:nvPr/>
         </p:nvSpPr>
@@ -19516,7 +21252,7 @@
       </p:sp>
       <p:sp>
         <p:nvSpPr>
-          <p:cNvPr id="151" name="TextBox 150"/>
+          <p:cNvPr id="181" name="TextBox 180"/>
           <p:cNvSpPr txBox="1"/>
           <p:nvPr/>
         </p:nvSpPr>
@@ -19558,7 +21294,7 @@
       </p:sp>
       <p:sp>
         <p:nvSpPr>
-          <p:cNvPr id="152" name="Rounded Rectangle 151"/>
+          <p:cNvPr id="182" name="Rounded Rectangle 181"/>
           <p:cNvSpPr/>
           <p:nvPr/>
         </p:nvSpPr>
@@ -19606,7 +21342,7 @@
       </p:sp>
       <p:sp>
         <p:nvSpPr>
-          <p:cNvPr id="153" name="Rounded Rectangle 152"/>
+          <p:cNvPr id="183" name="Rounded Rectangle 182"/>
           <p:cNvSpPr/>
           <p:nvPr/>
         </p:nvSpPr>
@@ -19652,7 +21388,7 @@
       </p:sp>
       <p:sp>
         <p:nvSpPr>
-          <p:cNvPr id="154" name="TextBox 153"/>
+          <p:cNvPr id="184" name="TextBox 183"/>
           <p:cNvSpPr txBox="1"/>
           <p:nvPr/>
         </p:nvSpPr>
@@ -19694,7 +21430,7 @@
       </p:sp>
       <p:sp>
         <p:nvSpPr>
-          <p:cNvPr id="155" name="TextBox 154"/>
+          <p:cNvPr id="185" name="TextBox 184"/>
           <p:cNvSpPr txBox="1"/>
           <p:nvPr/>
         </p:nvSpPr>
@@ -19736,7 +21472,7 @@
       </p:sp>
       <p:sp>
         <p:nvSpPr>
-          <p:cNvPr id="156" name="Rounded Rectangle 155"/>
+          <p:cNvPr id="186" name="Rounded Rectangle 185"/>
           <p:cNvSpPr/>
           <p:nvPr/>
         </p:nvSpPr>
@@ -19784,7 +21520,7 @@
       </p:sp>
       <p:sp>
         <p:nvSpPr>
-          <p:cNvPr id="157" name="Rounded Rectangle 156"/>
+          <p:cNvPr id="187" name="Rounded Rectangle 186"/>
           <p:cNvSpPr/>
           <p:nvPr/>
         </p:nvSpPr>
@@ -19830,7 +21566,7 @@
       </p:sp>
       <p:sp>
         <p:nvSpPr>
-          <p:cNvPr id="158" name="TextBox 157"/>
+          <p:cNvPr id="188" name="TextBox 187"/>
           <p:cNvSpPr txBox="1"/>
           <p:nvPr/>
         </p:nvSpPr>
@@ -19872,7 +21608,7 @@
       </p:sp>
       <p:sp>
         <p:nvSpPr>
-          <p:cNvPr id="159" name="TextBox 158"/>
+          <p:cNvPr id="189" name="TextBox 188"/>
           <p:cNvSpPr txBox="1"/>
           <p:nvPr/>
         </p:nvSpPr>
@@ -19914,7 +21650,7 @@
       </p:sp>
       <p:sp>
         <p:nvSpPr>
-          <p:cNvPr id="160" name="Rounded Rectangle 159"/>
+          <p:cNvPr id="190" name="Rounded Rectangle 189"/>
           <p:cNvSpPr/>
           <p:nvPr/>
         </p:nvSpPr>
@@ -19962,7 +21698,7 @@
       </p:sp>
       <p:sp>
         <p:nvSpPr>
-          <p:cNvPr id="161" name="Rounded Rectangle 160"/>
+          <p:cNvPr id="191" name="Rounded Rectangle 190"/>
           <p:cNvSpPr/>
           <p:nvPr/>
         </p:nvSpPr>
@@ -20008,7 +21744,7 @@
       </p:sp>
       <p:sp>
         <p:nvSpPr>
-          <p:cNvPr id="162" name="TextBox 161"/>
+          <p:cNvPr id="192" name="TextBox 191"/>
           <p:cNvSpPr txBox="1"/>
           <p:nvPr/>
         </p:nvSpPr>
@@ -20050,7 +21786,7 @@
       </p:sp>
       <p:sp>
         <p:nvSpPr>
-          <p:cNvPr id="163" name="TextBox 162"/>
+          <p:cNvPr id="193" name="TextBox 192"/>
           <p:cNvSpPr txBox="1"/>
           <p:nvPr/>
         </p:nvSpPr>
@@ -20092,7 +21828,7 @@
       </p:sp>
       <p:sp>
         <p:nvSpPr>
-          <p:cNvPr id="164" name="Rounded Rectangle 163"/>
+          <p:cNvPr id="194" name="Rounded Rectangle 193"/>
           <p:cNvSpPr/>
           <p:nvPr/>
         </p:nvSpPr>
@@ -20140,7 +21876,7 @@
       </p:sp>
       <p:sp>
         <p:nvSpPr>
-          <p:cNvPr id="165" name="Rounded Rectangle 164"/>
+          <p:cNvPr id="195" name="Rounded Rectangle 194"/>
           <p:cNvSpPr/>
           <p:nvPr/>
         </p:nvSpPr>
@@ -20186,7 +21922,7 @@
       </p:sp>
       <p:sp>
         <p:nvSpPr>
-          <p:cNvPr id="166" name="TextBox 165"/>
+          <p:cNvPr id="196" name="TextBox 195"/>
           <p:cNvSpPr txBox="1"/>
           <p:nvPr/>
         </p:nvSpPr>
@@ -20228,7 +21964,7 @@
       </p:sp>
       <p:sp>
         <p:nvSpPr>
-          <p:cNvPr id="167" name="TextBox 166"/>
+          <p:cNvPr id="197" name="TextBox 196"/>
           <p:cNvSpPr txBox="1"/>
           <p:nvPr/>
         </p:nvSpPr>
@@ -20270,7 +22006,7 @@
       </p:sp>
       <p:sp>
         <p:nvSpPr>
-          <p:cNvPr id="168" name="Rounded Rectangle 167"/>
+          <p:cNvPr id="198" name="Rounded Rectangle 197"/>
           <p:cNvSpPr/>
           <p:nvPr/>
         </p:nvSpPr>
@@ -20318,7 +22054,7 @@
       </p:sp>
       <p:sp>
         <p:nvSpPr>
-          <p:cNvPr id="169" name="Rounded Rectangle 168"/>
+          <p:cNvPr id="199" name="Rounded Rectangle 198"/>
           <p:cNvSpPr/>
           <p:nvPr/>
         </p:nvSpPr>
@@ -20364,7 +22100,7 @@
       </p:sp>
       <p:sp>
         <p:nvSpPr>
-          <p:cNvPr id="170" name="TextBox 169"/>
+          <p:cNvPr id="200" name="TextBox 199"/>
           <p:cNvSpPr txBox="1"/>
           <p:nvPr/>
         </p:nvSpPr>
@@ -20406,7 +22142,7 @@
       </p:sp>
       <p:sp>
         <p:nvSpPr>
-          <p:cNvPr id="171" name="TextBox 170"/>
+          <p:cNvPr id="201" name="TextBox 200"/>
           <p:cNvSpPr txBox="1"/>
           <p:nvPr/>
         </p:nvSpPr>
@@ -20448,7 +22184,7 @@
       </p:sp>
       <p:sp>
         <p:nvSpPr>
-          <p:cNvPr id="172" name="Rounded Rectangle 171"/>
+          <p:cNvPr id="202" name="Rounded Rectangle 201"/>
           <p:cNvSpPr/>
           <p:nvPr/>
         </p:nvSpPr>
@@ -20496,7 +22232,7 @@
       </p:sp>
       <p:sp>
         <p:nvSpPr>
-          <p:cNvPr id="173" name="Rounded Rectangle 172"/>
+          <p:cNvPr id="203" name="Rounded Rectangle 202"/>
           <p:cNvSpPr/>
           <p:nvPr/>
         </p:nvSpPr>
@@ -20542,7 +22278,7 @@
       </p:sp>
       <p:sp>
         <p:nvSpPr>
-          <p:cNvPr id="174" name="TextBox 173"/>
+          <p:cNvPr id="204" name="TextBox 203"/>
           <p:cNvSpPr txBox="1"/>
           <p:nvPr/>
         </p:nvSpPr>
@@ -20584,7 +22320,7 @@
       </p:sp>
       <p:sp>
         <p:nvSpPr>
-          <p:cNvPr id="175" name="TextBox 174"/>
+          <p:cNvPr id="205" name="TextBox 204"/>
           <p:cNvSpPr txBox="1"/>
           <p:nvPr/>
         </p:nvSpPr>
@@ -20626,7 +22362,7 @@
       </p:sp>
       <p:sp>
         <p:nvSpPr>
-          <p:cNvPr id="176" name="Rounded Rectangle 175"/>
+          <p:cNvPr id="206" name="Rounded Rectangle 205"/>
           <p:cNvSpPr/>
           <p:nvPr/>
         </p:nvSpPr>
@@ -20674,7 +22410,7 @@
       </p:sp>
       <p:sp>
         <p:nvSpPr>
-          <p:cNvPr id="177" name="Rounded Rectangle 176"/>
+          <p:cNvPr id="207" name="Rounded Rectangle 206"/>
           <p:cNvSpPr/>
           <p:nvPr/>
         </p:nvSpPr>
@@ -20720,7 +22456,7 @@
       </p:sp>
       <p:sp>
         <p:nvSpPr>
-          <p:cNvPr id="178" name="TextBox 177"/>
+          <p:cNvPr id="208" name="TextBox 207"/>
           <p:cNvSpPr txBox="1"/>
           <p:nvPr/>
         </p:nvSpPr>
@@ -20762,7 +22498,7 @@
       </p:sp>
       <p:sp>
         <p:nvSpPr>
-          <p:cNvPr id="179" name="TextBox 178"/>
+          <p:cNvPr id="209" name="TextBox 208"/>
           <p:cNvSpPr txBox="1"/>
           <p:nvPr/>
         </p:nvSpPr>
@@ -26766,7 +28502,1421 @@
       </p:sp>
       <p:sp>
         <p:nvSpPr>
-          <p:cNvPr id="223" name="TextBox 222"/>
+          <p:cNvPr id="225" name="Rounded Rectangle 224"/>
+          <p:cNvSpPr/>
+          <p:nvPr/>
+        </p:nvSpPr>
+        <p:spPr>
+          <a:xfrm>
+            <a:off x="384048" y="2331720"/>
+            <a:ext cx="1417320" cy="713232"/>
+          </a:xfrm>
+          <a:prstGeom prst="roundRect">
+            <a:avLst>
+              <a:gd name="adj" fmla="val 4000"/>
+            </a:avLst>
+          </a:prstGeom>
+          <a:solidFill>
+            <a:srgbClr val="EEF0FF"/>
+          </a:solidFill>
+          <a:ln w="9525">
+            <a:solidFill>
+              <a:srgbClr val="E2E8F0"/>
+            </a:solidFill>
+          </a:ln>
+          <a:effectLst/>
+        </p:spPr>
+        <p:style>
+          <a:lnRef idx="1">
+            <a:schemeClr val="accent1"/>
+          </a:lnRef>
+          <a:fillRef idx="3">
+            <a:schemeClr val="accent1"/>
+          </a:fillRef>
+          <a:effectRef idx="2">
+            <a:schemeClr val="accent1"/>
+          </a:effectRef>
+          <a:fontRef idx="minor">
+            <a:schemeClr val="lt1"/>
+          </a:fontRef>
+        </p:style>
+        <p:txBody>
+          <a:bodyPr rtlCol="0" anchor="ctr"/>
+          <a:lstStyle/>
+          <a:p>
+            <a:pPr algn="ctr"/>
+          </a:p>
+        </p:txBody>
+      </p:sp>
+      <p:sp>
+        <p:nvSpPr>
+          <p:cNvPr id="228" name="Rounded Rectangle 227"/>
+          <p:cNvSpPr/>
+          <p:nvPr/>
+        </p:nvSpPr>
+        <p:spPr>
+          <a:xfrm>
+            <a:off x="384048" y="3246120"/>
+            <a:ext cx="1417320" cy="713232"/>
+          </a:xfrm>
+          <a:prstGeom prst="roundRect">
+            <a:avLst>
+              <a:gd name="adj" fmla="val 4000"/>
+            </a:avLst>
+          </a:prstGeom>
+          <a:solidFill>
+            <a:srgbClr val="F8FAFC"/>
+          </a:solidFill>
+          <a:ln w="9525">
+            <a:solidFill>
+              <a:srgbClr val="E2E8F0"/>
+            </a:solidFill>
+          </a:ln>
+          <a:effectLst/>
+        </p:spPr>
+        <p:style>
+          <a:lnRef idx="1">
+            <a:schemeClr val="accent1"/>
+          </a:lnRef>
+          <a:fillRef idx="3">
+            <a:schemeClr val="accent1"/>
+          </a:fillRef>
+          <a:effectRef idx="2">
+            <a:schemeClr val="accent1"/>
+          </a:effectRef>
+          <a:fontRef idx="minor">
+            <a:schemeClr val="lt1"/>
+          </a:fontRef>
+        </p:style>
+        <p:txBody>
+          <a:bodyPr rtlCol="0" anchor="ctr"/>
+          <a:lstStyle/>
+          <a:p>
+            <a:pPr algn="ctr"/>
+          </a:p>
+        </p:txBody>
+      </p:sp>
+      <p:sp>
+        <p:nvSpPr>
+          <p:cNvPr id="231" name="Rounded Rectangle 230"/>
+          <p:cNvSpPr/>
+          <p:nvPr/>
+        </p:nvSpPr>
+        <p:spPr>
+          <a:xfrm>
+            <a:off x="2057400" y="1417320"/>
+            <a:ext cx="1920240" cy="713232"/>
+          </a:xfrm>
+          <a:prstGeom prst="roundRect">
+            <a:avLst>
+              <a:gd name="adj" fmla="val 4000"/>
+            </a:avLst>
+          </a:prstGeom>
+          <a:solidFill>
+            <a:srgbClr val="FFFFFF"/>
+          </a:solidFill>
+          <a:ln w="9525">
+            <a:solidFill>
+              <a:srgbClr val="E2E8F0"/>
+            </a:solidFill>
+          </a:ln>
+          <a:effectLst/>
+        </p:spPr>
+        <p:style>
+          <a:lnRef idx="1">
+            <a:schemeClr val="accent1"/>
+          </a:lnRef>
+          <a:fillRef idx="3">
+            <a:schemeClr val="accent1"/>
+          </a:fillRef>
+          <a:effectRef idx="2">
+            <a:schemeClr val="accent1"/>
+          </a:effectRef>
+          <a:fontRef idx="minor">
+            <a:schemeClr val="lt1"/>
+          </a:fontRef>
+        </p:style>
+        <p:txBody>
+          <a:bodyPr rtlCol="0" anchor="ctr"/>
+          <a:lstStyle/>
+          <a:p>
+            <a:pPr algn="ctr"/>
+          </a:p>
+        </p:txBody>
+      </p:sp>
+      <p:sp>
+        <p:nvSpPr>
+          <p:cNvPr id="234" name="Rounded Rectangle 233"/>
+          <p:cNvSpPr/>
+          <p:nvPr/>
+        </p:nvSpPr>
+        <p:spPr>
+          <a:xfrm>
+            <a:off x="2057400" y="2331720"/>
+            <a:ext cx="1920240" cy="713232"/>
+          </a:xfrm>
+          <a:prstGeom prst="roundRect">
+            <a:avLst>
+              <a:gd name="adj" fmla="val 4000"/>
+            </a:avLst>
+          </a:prstGeom>
+          <a:solidFill>
+            <a:srgbClr val="FFFFFF"/>
+          </a:solidFill>
+          <a:ln w="9525">
+            <a:solidFill>
+              <a:srgbClr val="E2E8F0"/>
+            </a:solidFill>
+          </a:ln>
+          <a:effectLst/>
+        </p:spPr>
+        <p:style>
+          <a:lnRef idx="1">
+            <a:schemeClr val="accent1"/>
+          </a:lnRef>
+          <a:fillRef idx="3">
+            <a:schemeClr val="accent1"/>
+          </a:fillRef>
+          <a:effectRef idx="2">
+            <a:schemeClr val="accent1"/>
+          </a:effectRef>
+          <a:fontRef idx="minor">
+            <a:schemeClr val="lt1"/>
+          </a:fontRef>
+        </p:style>
+        <p:txBody>
+          <a:bodyPr rtlCol="0" anchor="ctr"/>
+          <a:lstStyle/>
+          <a:p>
+            <a:pPr algn="ctr"/>
+          </a:p>
+        </p:txBody>
+      </p:sp>
+      <p:sp>
+        <p:nvSpPr>
+          <p:cNvPr id="237" name="Rounded Rectangle 236"/>
+          <p:cNvSpPr/>
+          <p:nvPr/>
+        </p:nvSpPr>
+        <p:spPr>
+          <a:xfrm>
+            <a:off x="2057400" y="3246120"/>
+            <a:ext cx="1920240" cy="713232"/>
+          </a:xfrm>
+          <a:prstGeom prst="roundRect">
+            <a:avLst>
+              <a:gd name="adj" fmla="val 4000"/>
+            </a:avLst>
+          </a:prstGeom>
+          <a:solidFill>
+            <a:srgbClr val="FFFFFF"/>
+          </a:solidFill>
+          <a:ln w="9525">
+            <a:solidFill>
+              <a:srgbClr val="E2E8F0"/>
+            </a:solidFill>
+          </a:ln>
+          <a:effectLst/>
+        </p:spPr>
+        <p:style>
+          <a:lnRef idx="1">
+            <a:schemeClr val="accent1"/>
+          </a:lnRef>
+          <a:fillRef idx="3">
+            <a:schemeClr val="accent1"/>
+          </a:fillRef>
+          <a:effectRef idx="2">
+            <a:schemeClr val="accent1"/>
+          </a:effectRef>
+          <a:fontRef idx="minor">
+            <a:schemeClr val="lt1"/>
+          </a:fontRef>
+        </p:style>
+        <p:txBody>
+          <a:bodyPr rtlCol="0" anchor="ctr"/>
+          <a:lstStyle/>
+          <a:p>
+            <a:pPr algn="ctr"/>
+          </a:p>
+        </p:txBody>
+      </p:sp>
+      <p:sp>
+        <p:nvSpPr>
+          <p:cNvPr id="240" name="Rounded Rectangle 239"/>
+          <p:cNvSpPr/>
+          <p:nvPr/>
+        </p:nvSpPr>
+        <p:spPr>
+          <a:xfrm>
+            <a:off x="5074920" y="1417320"/>
+            <a:ext cx="1920240" cy="713232"/>
+          </a:xfrm>
+          <a:prstGeom prst="roundRect">
+            <a:avLst>
+              <a:gd name="adj" fmla="val 4000"/>
+            </a:avLst>
+          </a:prstGeom>
+          <a:solidFill>
+            <a:srgbClr val="FFFFFF"/>
+          </a:solidFill>
+          <a:ln w="9525">
+            <a:solidFill>
+              <a:srgbClr val="E2E8F0"/>
+            </a:solidFill>
+          </a:ln>
+          <a:effectLst/>
+        </p:spPr>
+        <p:style>
+          <a:lnRef idx="1">
+            <a:schemeClr val="accent1"/>
+          </a:lnRef>
+          <a:fillRef idx="3">
+            <a:schemeClr val="accent1"/>
+          </a:fillRef>
+          <a:effectRef idx="2">
+            <a:schemeClr val="accent1"/>
+          </a:effectRef>
+          <a:fontRef idx="minor">
+            <a:schemeClr val="lt1"/>
+          </a:fontRef>
+        </p:style>
+        <p:txBody>
+          <a:bodyPr rtlCol="0" anchor="ctr"/>
+          <a:lstStyle/>
+          <a:p>
+            <a:pPr algn="ctr"/>
+          </a:p>
+        </p:txBody>
+      </p:sp>
+      <p:sp>
+        <p:nvSpPr>
+          <p:cNvPr id="243" name="Rounded Rectangle 242"/>
+          <p:cNvSpPr/>
+          <p:nvPr/>
+        </p:nvSpPr>
+        <p:spPr>
+          <a:xfrm>
+            <a:off x="5074920" y="2331720"/>
+            <a:ext cx="1920240" cy="713232"/>
+          </a:xfrm>
+          <a:prstGeom prst="roundRect">
+            <a:avLst>
+              <a:gd name="adj" fmla="val 4000"/>
+            </a:avLst>
+          </a:prstGeom>
+          <a:solidFill>
+            <a:srgbClr val="FFFFFF"/>
+          </a:solidFill>
+          <a:ln w="9525">
+            <a:solidFill>
+              <a:srgbClr val="E2E8F0"/>
+            </a:solidFill>
+          </a:ln>
+          <a:effectLst/>
+        </p:spPr>
+        <p:style>
+          <a:lnRef idx="1">
+            <a:schemeClr val="accent1"/>
+          </a:lnRef>
+          <a:fillRef idx="3">
+            <a:schemeClr val="accent1"/>
+          </a:fillRef>
+          <a:effectRef idx="2">
+            <a:schemeClr val="accent1"/>
+          </a:effectRef>
+          <a:fontRef idx="minor">
+            <a:schemeClr val="lt1"/>
+          </a:fontRef>
+        </p:style>
+        <p:txBody>
+          <a:bodyPr rtlCol="0" anchor="ctr"/>
+          <a:lstStyle/>
+          <a:p>
+            <a:pPr algn="ctr"/>
+          </a:p>
+        </p:txBody>
+      </p:sp>
+      <p:sp>
+        <p:nvSpPr>
+          <p:cNvPr id="246" name="Rounded Rectangle 245"/>
+          <p:cNvSpPr/>
+          <p:nvPr/>
+        </p:nvSpPr>
+        <p:spPr>
+          <a:xfrm>
+            <a:off x="5074920" y="3246120"/>
+            <a:ext cx="1920240" cy="713232"/>
+          </a:xfrm>
+          <a:prstGeom prst="roundRect">
+            <a:avLst>
+              <a:gd name="adj" fmla="val 4000"/>
+            </a:avLst>
+          </a:prstGeom>
+          <a:solidFill>
+            <a:srgbClr val="FFFFFF"/>
+          </a:solidFill>
+          <a:ln w="9525">
+            <a:solidFill>
+              <a:srgbClr val="E2E8F0"/>
+            </a:solidFill>
+          </a:ln>
+          <a:effectLst/>
+        </p:spPr>
+        <p:style>
+          <a:lnRef idx="1">
+            <a:schemeClr val="accent1"/>
+          </a:lnRef>
+          <a:fillRef idx="3">
+            <a:schemeClr val="accent1"/>
+          </a:fillRef>
+          <a:effectRef idx="2">
+            <a:schemeClr val="accent1"/>
+          </a:effectRef>
+          <a:fontRef idx="minor">
+            <a:schemeClr val="lt1"/>
+          </a:fontRef>
+        </p:style>
+        <p:txBody>
+          <a:bodyPr rtlCol="0" anchor="ctr"/>
+          <a:lstStyle/>
+          <a:p>
+            <a:pPr algn="ctr"/>
+          </a:p>
+        </p:txBody>
+      </p:sp>
+      <p:sp>
+        <p:nvSpPr>
+          <p:cNvPr id="249" name="Rounded Rectangle 248"/>
+          <p:cNvSpPr/>
+          <p:nvPr/>
+        </p:nvSpPr>
+        <p:spPr>
+          <a:xfrm>
+            <a:off x="7360920" y="1417320"/>
+            <a:ext cx="1508760" cy="713232"/>
+          </a:xfrm>
+          <a:prstGeom prst="roundRect">
+            <a:avLst>
+              <a:gd name="adj" fmla="val 4000"/>
+            </a:avLst>
+          </a:prstGeom>
+          <a:solidFill>
+            <a:srgbClr val="FFFFFF"/>
+          </a:solidFill>
+          <a:ln w="9525">
+            <a:solidFill>
+              <a:srgbClr val="E2E8F0"/>
+            </a:solidFill>
+          </a:ln>
+          <a:effectLst/>
+        </p:spPr>
+        <p:style>
+          <a:lnRef idx="1">
+            <a:schemeClr val="accent1"/>
+          </a:lnRef>
+          <a:fillRef idx="3">
+            <a:schemeClr val="accent1"/>
+          </a:fillRef>
+          <a:effectRef idx="2">
+            <a:schemeClr val="accent1"/>
+          </a:effectRef>
+          <a:fontRef idx="minor">
+            <a:schemeClr val="lt1"/>
+          </a:fontRef>
+        </p:style>
+        <p:txBody>
+          <a:bodyPr rtlCol="0" anchor="ctr"/>
+          <a:lstStyle/>
+          <a:p>
+            <a:pPr algn="ctr"/>
+          </a:p>
+        </p:txBody>
+      </p:sp>
+      <p:sp>
+        <p:nvSpPr>
+          <p:cNvPr id="252" name="Rounded Rectangle 251"/>
+          <p:cNvSpPr/>
+          <p:nvPr/>
+        </p:nvSpPr>
+        <p:spPr>
+          <a:xfrm>
+            <a:off x="7360920" y="2331720"/>
+            <a:ext cx="1508760" cy="713232"/>
+          </a:xfrm>
+          <a:prstGeom prst="roundRect">
+            <a:avLst>
+              <a:gd name="adj" fmla="val 4000"/>
+            </a:avLst>
+          </a:prstGeom>
+          <a:solidFill>
+            <a:srgbClr val="FFFFFF"/>
+          </a:solidFill>
+          <a:ln w="9525">
+            <a:solidFill>
+              <a:srgbClr val="E2E8F0"/>
+            </a:solidFill>
+          </a:ln>
+          <a:effectLst/>
+        </p:spPr>
+        <p:style>
+          <a:lnRef idx="1">
+            <a:schemeClr val="accent1"/>
+          </a:lnRef>
+          <a:fillRef idx="3">
+            <a:schemeClr val="accent1"/>
+          </a:fillRef>
+          <a:effectRef idx="2">
+            <a:schemeClr val="accent1"/>
+          </a:effectRef>
+          <a:fontRef idx="minor">
+            <a:schemeClr val="lt1"/>
+          </a:fontRef>
+        </p:style>
+        <p:txBody>
+          <a:bodyPr rtlCol="0" anchor="ctr"/>
+          <a:lstStyle/>
+          <a:p>
+            <a:pPr algn="ctr"/>
+          </a:p>
+        </p:txBody>
+      </p:sp>
+      <p:sp>
+        <p:nvSpPr>
+          <p:cNvPr id="255" name="Rounded Rectangle 254"/>
+          <p:cNvSpPr/>
+          <p:nvPr/>
+        </p:nvSpPr>
+        <p:spPr>
+          <a:xfrm>
+            <a:off x="7360920" y="3246120"/>
+            <a:ext cx="1508760" cy="713232"/>
+          </a:xfrm>
+          <a:prstGeom prst="roundRect">
+            <a:avLst>
+              <a:gd name="adj" fmla="val 4000"/>
+            </a:avLst>
+          </a:prstGeom>
+          <a:solidFill>
+            <a:srgbClr val="FFFFFF"/>
+          </a:solidFill>
+          <a:ln w="9525">
+            <a:solidFill>
+              <a:srgbClr val="E2E8F0"/>
+            </a:solidFill>
+          </a:ln>
+          <a:effectLst/>
+        </p:spPr>
+        <p:style>
+          <a:lnRef idx="1">
+            <a:schemeClr val="accent1"/>
+          </a:lnRef>
+          <a:fillRef idx="3">
+            <a:schemeClr val="accent1"/>
+          </a:fillRef>
+          <a:effectRef idx="2">
+            <a:schemeClr val="accent1"/>
+          </a:effectRef>
+          <a:fontRef idx="minor">
+            <a:schemeClr val="lt1"/>
+          </a:fontRef>
+        </p:style>
+        <p:txBody>
+          <a:bodyPr rtlCol="0" anchor="ctr"/>
+          <a:lstStyle/>
+          <a:p>
+            <a:pPr algn="ctr"/>
+          </a:p>
+        </p:txBody>
+      </p:sp>
+      <p:sp>
+        <p:nvSpPr>
+          <p:cNvPr id="258" name="Rectangle 257"/>
+          <p:cNvSpPr/>
+          <p:nvPr/>
+        </p:nvSpPr>
+        <p:spPr>
+          <a:xfrm>
+            <a:off x="1847088" y="1755267"/>
+            <a:ext cx="128524" cy="19050"/>
+          </a:xfrm>
+          <a:prstGeom prst="rect">
+            <a:avLst/>
+          </a:prstGeom>
+          <a:solidFill>
+            <a:srgbClr val="4F46E5"/>
+          </a:solidFill>
+          <a:ln>
+            <a:noFill/>
+          </a:ln>
+          <a:effectLst/>
+        </p:spPr>
+        <p:style>
+          <a:lnRef idx="1">
+            <a:schemeClr val="accent1"/>
+          </a:lnRef>
+          <a:fillRef idx="3">
+            <a:schemeClr val="accent1"/>
+          </a:fillRef>
+          <a:effectRef idx="2">
+            <a:schemeClr val="accent1"/>
+          </a:effectRef>
+          <a:fontRef idx="minor">
+            <a:schemeClr val="lt1"/>
+          </a:fontRef>
+        </p:style>
+        <p:txBody>
+          <a:bodyPr rtlCol="0" anchor="ctr"/>
+          <a:lstStyle/>
+          <a:p>
+            <a:pPr algn="ctr"/>
+          </a:p>
+        </p:txBody>
+      </p:sp>
+      <p:sp>
+        <p:nvSpPr>
+          <p:cNvPr id="259" name="Isosceles Triangle 258"/>
+          <p:cNvSpPr/>
+          <p:nvPr/>
+        </p:nvSpPr>
+        <p:spPr>
+          <a:xfrm rot="5400000">
+            <a:off x="1962912" y="1713992"/>
+            <a:ext cx="76200" cy="101600"/>
+          </a:xfrm>
+          <a:prstGeom prst="triangle">
+            <a:avLst/>
+          </a:prstGeom>
+          <a:solidFill>
+            <a:srgbClr val="4F46E5"/>
+          </a:solidFill>
+          <a:ln>
+            <a:noFill/>
+          </a:ln>
+          <a:effectLst/>
+        </p:spPr>
+        <p:style>
+          <a:lnRef idx="1">
+            <a:schemeClr val="accent1"/>
+          </a:lnRef>
+          <a:fillRef idx="3">
+            <a:schemeClr val="accent1"/>
+          </a:fillRef>
+          <a:effectRef idx="2">
+            <a:schemeClr val="accent1"/>
+          </a:effectRef>
+          <a:fontRef idx="minor">
+            <a:schemeClr val="lt1"/>
+          </a:fontRef>
+        </p:style>
+        <p:txBody>
+          <a:bodyPr rtlCol="0" anchor="ctr"/>
+          <a:lstStyle/>
+          <a:p>
+            <a:pPr algn="ctr"/>
+          </a:p>
+        </p:txBody>
+      </p:sp>
+      <p:sp>
+        <p:nvSpPr>
+          <p:cNvPr id="260" name="Rectangle 259"/>
+          <p:cNvSpPr/>
+          <p:nvPr/>
+        </p:nvSpPr>
+        <p:spPr>
+          <a:xfrm>
+            <a:off x="4005072" y="1755267"/>
+            <a:ext cx="988060" cy="19050"/>
+          </a:xfrm>
+          <a:prstGeom prst="rect">
+            <a:avLst/>
+          </a:prstGeom>
+          <a:solidFill>
+            <a:srgbClr val="4F46E5"/>
+          </a:solidFill>
+          <a:ln>
+            <a:noFill/>
+          </a:ln>
+          <a:effectLst/>
+        </p:spPr>
+        <p:style>
+          <a:lnRef idx="1">
+            <a:schemeClr val="accent1"/>
+          </a:lnRef>
+          <a:fillRef idx="3">
+            <a:schemeClr val="accent1"/>
+          </a:fillRef>
+          <a:effectRef idx="2">
+            <a:schemeClr val="accent1"/>
+          </a:effectRef>
+          <a:fontRef idx="minor">
+            <a:schemeClr val="lt1"/>
+          </a:fontRef>
+        </p:style>
+        <p:txBody>
+          <a:bodyPr rtlCol="0" anchor="ctr"/>
+          <a:lstStyle/>
+          <a:p>
+            <a:pPr algn="ctr"/>
+          </a:p>
+        </p:txBody>
+      </p:sp>
+      <p:sp>
+        <p:nvSpPr>
+          <p:cNvPr id="261" name="Isosceles Triangle 260"/>
+          <p:cNvSpPr/>
+          <p:nvPr/>
+        </p:nvSpPr>
+        <p:spPr>
+          <a:xfrm rot="5400000">
+            <a:off x="4980432" y="1713992"/>
+            <a:ext cx="76200" cy="101600"/>
+          </a:xfrm>
+          <a:prstGeom prst="triangle">
+            <a:avLst/>
+          </a:prstGeom>
+          <a:solidFill>
+            <a:srgbClr val="4F46E5"/>
+          </a:solidFill>
+          <a:ln>
+            <a:noFill/>
+          </a:ln>
+          <a:effectLst/>
+        </p:spPr>
+        <p:style>
+          <a:lnRef idx="1">
+            <a:schemeClr val="accent1"/>
+          </a:lnRef>
+          <a:fillRef idx="3">
+            <a:schemeClr val="accent1"/>
+          </a:fillRef>
+          <a:effectRef idx="2">
+            <a:schemeClr val="accent1"/>
+          </a:effectRef>
+          <a:fontRef idx="minor">
+            <a:schemeClr val="lt1"/>
+          </a:fontRef>
+        </p:style>
+        <p:txBody>
+          <a:bodyPr rtlCol="0" anchor="ctr"/>
+          <a:lstStyle/>
+          <a:p>
+            <a:pPr algn="ctr"/>
+          </a:p>
+        </p:txBody>
+      </p:sp>
+      <p:sp>
+        <p:nvSpPr>
+          <p:cNvPr id="262" name="Rectangle 261"/>
+          <p:cNvSpPr/>
+          <p:nvPr/>
+        </p:nvSpPr>
+        <p:spPr>
+          <a:xfrm>
+            <a:off x="7022592" y="1755267"/>
+            <a:ext cx="256539" cy="19050"/>
+          </a:xfrm>
+          <a:prstGeom prst="rect">
+            <a:avLst/>
+          </a:prstGeom>
+          <a:solidFill>
+            <a:srgbClr val="4F46E5"/>
+          </a:solidFill>
+          <a:ln>
+            <a:noFill/>
+          </a:ln>
+          <a:effectLst/>
+        </p:spPr>
+        <p:style>
+          <a:lnRef idx="1">
+            <a:schemeClr val="accent1"/>
+          </a:lnRef>
+          <a:fillRef idx="3">
+            <a:schemeClr val="accent1"/>
+          </a:fillRef>
+          <a:effectRef idx="2">
+            <a:schemeClr val="accent1"/>
+          </a:effectRef>
+          <a:fontRef idx="minor">
+            <a:schemeClr val="lt1"/>
+          </a:fontRef>
+        </p:style>
+        <p:txBody>
+          <a:bodyPr rtlCol="0" anchor="ctr"/>
+          <a:lstStyle/>
+          <a:p>
+            <a:pPr algn="ctr"/>
+          </a:p>
+        </p:txBody>
+      </p:sp>
+      <p:sp>
+        <p:nvSpPr>
+          <p:cNvPr id="263" name="Isosceles Triangle 262"/>
+          <p:cNvSpPr/>
+          <p:nvPr/>
+        </p:nvSpPr>
+        <p:spPr>
+          <a:xfrm rot="5400000">
+            <a:off x="7266431" y="1713992"/>
+            <a:ext cx="76200" cy="101600"/>
+          </a:xfrm>
+          <a:prstGeom prst="triangle">
+            <a:avLst/>
+          </a:prstGeom>
+          <a:solidFill>
+            <a:srgbClr val="4F46E5"/>
+          </a:solidFill>
+          <a:ln>
+            <a:noFill/>
+          </a:ln>
+          <a:effectLst/>
+        </p:spPr>
+        <p:style>
+          <a:lnRef idx="1">
+            <a:schemeClr val="accent1"/>
+          </a:lnRef>
+          <a:fillRef idx="3">
+            <a:schemeClr val="accent1"/>
+          </a:fillRef>
+          <a:effectRef idx="2">
+            <a:schemeClr val="accent1"/>
+          </a:effectRef>
+          <a:fontRef idx="minor">
+            <a:schemeClr val="lt1"/>
+          </a:fontRef>
+        </p:style>
+        <p:txBody>
+          <a:bodyPr rtlCol="0" anchor="ctr"/>
+          <a:lstStyle/>
+          <a:p>
+            <a:pPr algn="ctr"/>
+          </a:p>
+        </p:txBody>
+      </p:sp>
+      <p:sp>
+        <p:nvSpPr>
+          <p:cNvPr id="264" name="Rectangle 263"/>
+          <p:cNvSpPr/>
+          <p:nvPr/>
+        </p:nvSpPr>
+        <p:spPr>
+          <a:xfrm>
+            <a:off x="1847088" y="2669667"/>
+            <a:ext cx="128524" cy="19050"/>
+          </a:xfrm>
+          <a:prstGeom prst="rect">
+            <a:avLst/>
+          </a:prstGeom>
+          <a:solidFill>
+            <a:srgbClr val="4F46E5"/>
+          </a:solidFill>
+          <a:ln>
+            <a:noFill/>
+          </a:ln>
+          <a:effectLst/>
+        </p:spPr>
+        <p:style>
+          <a:lnRef idx="1">
+            <a:schemeClr val="accent1"/>
+          </a:lnRef>
+          <a:fillRef idx="3">
+            <a:schemeClr val="accent1"/>
+          </a:fillRef>
+          <a:effectRef idx="2">
+            <a:schemeClr val="accent1"/>
+          </a:effectRef>
+          <a:fontRef idx="minor">
+            <a:schemeClr val="lt1"/>
+          </a:fontRef>
+        </p:style>
+        <p:txBody>
+          <a:bodyPr rtlCol="0" anchor="ctr"/>
+          <a:lstStyle/>
+          <a:p>
+            <a:pPr algn="ctr"/>
+          </a:p>
+        </p:txBody>
+      </p:sp>
+      <p:sp>
+        <p:nvSpPr>
+          <p:cNvPr id="265" name="Isosceles Triangle 264"/>
+          <p:cNvSpPr/>
+          <p:nvPr/>
+        </p:nvSpPr>
+        <p:spPr>
+          <a:xfrm rot="5400000">
+            <a:off x="1962912" y="2628392"/>
+            <a:ext cx="76200" cy="101600"/>
+          </a:xfrm>
+          <a:prstGeom prst="triangle">
+            <a:avLst/>
+          </a:prstGeom>
+          <a:solidFill>
+            <a:srgbClr val="4F46E5"/>
+          </a:solidFill>
+          <a:ln>
+            <a:noFill/>
+          </a:ln>
+          <a:effectLst/>
+        </p:spPr>
+        <p:style>
+          <a:lnRef idx="1">
+            <a:schemeClr val="accent1"/>
+          </a:lnRef>
+          <a:fillRef idx="3">
+            <a:schemeClr val="accent1"/>
+          </a:fillRef>
+          <a:effectRef idx="2">
+            <a:schemeClr val="accent1"/>
+          </a:effectRef>
+          <a:fontRef idx="minor">
+            <a:schemeClr val="lt1"/>
+          </a:fontRef>
+        </p:style>
+        <p:txBody>
+          <a:bodyPr rtlCol="0" anchor="ctr"/>
+          <a:lstStyle/>
+          <a:p>
+            <a:pPr algn="ctr"/>
+          </a:p>
+        </p:txBody>
+      </p:sp>
+      <p:sp>
+        <p:nvSpPr>
+          <p:cNvPr id="266" name="Rectangle 265"/>
+          <p:cNvSpPr/>
+          <p:nvPr/>
+        </p:nvSpPr>
+        <p:spPr>
+          <a:xfrm>
+            <a:off x="4005072" y="2669667"/>
+            <a:ext cx="988060" cy="19050"/>
+          </a:xfrm>
+          <a:prstGeom prst="rect">
+            <a:avLst/>
+          </a:prstGeom>
+          <a:solidFill>
+            <a:srgbClr val="4F46E5"/>
+          </a:solidFill>
+          <a:ln>
+            <a:noFill/>
+          </a:ln>
+          <a:effectLst/>
+        </p:spPr>
+        <p:style>
+          <a:lnRef idx="1">
+            <a:schemeClr val="accent1"/>
+          </a:lnRef>
+          <a:fillRef idx="3">
+            <a:schemeClr val="accent1"/>
+          </a:fillRef>
+          <a:effectRef idx="2">
+            <a:schemeClr val="accent1"/>
+          </a:effectRef>
+          <a:fontRef idx="minor">
+            <a:schemeClr val="lt1"/>
+          </a:fontRef>
+        </p:style>
+        <p:txBody>
+          <a:bodyPr rtlCol="0" anchor="ctr"/>
+          <a:lstStyle/>
+          <a:p>
+            <a:pPr algn="ctr"/>
+          </a:p>
+        </p:txBody>
+      </p:sp>
+      <p:sp>
+        <p:nvSpPr>
+          <p:cNvPr id="267" name="Isosceles Triangle 266"/>
+          <p:cNvSpPr/>
+          <p:nvPr/>
+        </p:nvSpPr>
+        <p:spPr>
+          <a:xfrm rot="5400000">
+            <a:off x="4980432" y="2628392"/>
+            <a:ext cx="76200" cy="101600"/>
+          </a:xfrm>
+          <a:prstGeom prst="triangle">
+            <a:avLst/>
+          </a:prstGeom>
+          <a:solidFill>
+            <a:srgbClr val="4F46E5"/>
+          </a:solidFill>
+          <a:ln>
+            <a:noFill/>
+          </a:ln>
+          <a:effectLst/>
+        </p:spPr>
+        <p:style>
+          <a:lnRef idx="1">
+            <a:schemeClr val="accent1"/>
+          </a:lnRef>
+          <a:fillRef idx="3">
+            <a:schemeClr val="accent1"/>
+          </a:fillRef>
+          <a:effectRef idx="2">
+            <a:schemeClr val="accent1"/>
+          </a:effectRef>
+          <a:fontRef idx="minor">
+            <a:schemeClr val="lt1"/>
+          </a:fontRef>
+        </p:style>
+        <p:txBody>
+          <a:bodyPr rtlCol="0" anchor="ctr"/>
+          <a:lstStyle/>
+          <a:p>
+            <a:pPr algn="ctr"/>
+          </a:p>
+        </p:txBody>
+      </p:sp>
+      <p:sp>
+        <p:nvSpPr>
+          <p:cNvPr id="268" name="Rectangle 267"/>
+          <p:cNvSpPr/>
+          <p:nvPr/>
+        </p:nvSpPr>
+        <p:spPr>
+          <a:xfrm>
+            <a:off x="7022592" y="2669667"/>
+            <a:ext cx="256539" cy="19050"/>
+          </a:xfrm>
+          <a:prstGeom prst="rect">
+            <a:avLst/>
+          </a:prstGeom>
+          <a:solidFill>
+            <a:srgbClr val="4F46E5"/>
+          </a:solidFill>
+          <a:ln>
+            <a:noFill/>
+          </a:ln>
+          <a:effectLst/>
+        </p:spPr>
+        <p:style>
+          <a:lnRef idx="1">
+            <a:schemeClr val="accent1"/>
+          </a:lnRef>
+          <a:fillRef idx="3">
+            <a:schemeClr val="accent1"/>
+          </a:fillRef>
+          <a:effectRef idx="2">
+            <a:schemeClr val="accent1"/>
+          </a:effectRef>
+          <a:fontRef idx="minor">
+            <a:schemeClr val="lt1"/>
+          </a:fontRef>
+        </p:style>
+        <p:txBody>
+          <a:bodyPr rtlCol="0" anchor="ctr"/>
+          <a:lstStyle/>
+          <a:p>
+            <a:pPr algn="ctr"/>
+          </a:p>
+        </p:txBody>
+      </p:sp>
+      <p:sp>
+        <p:nvSpPr>
+          <p:cNvPr id="269" name="Isosceles Triangle 268"/>
+          <p:cNvSpPr/>
+          <p:nvPr/>
+        </p:nvSpPr>
+        <p:spPr>
+          <a:xfrm rot="5400000">
+            <a:off x="7266431" y="2628392"/>
+            <a:ext cx="76200" cy="101600"/>
+          </a:xfrm>
+          <a:prstGeom prst="triangle">
+            <a:avLst/>
+          </a:prstGeom>
+          <a:solidFill>
+            <a:srgbClr val="4F46E5"/>
+          </a:solidFill>
+          <a:ln>
+            <a:noFill/>
+          </a:ln>
+          <a:effectLst/>
+        </p:spPr>
+        <p:style>
+          <a:lnRef idx="1">
+            <a:schemeClr val="accent1"/>
+          </a:lnRef>
+          <a:fillRef idx="3">
+            <a:schemeClr val="accent1"/>
+          </a:fillRef>
+          <a:effectRef idx="2">
+            <a:schemeClr val="accent1"/>
+          </a:effectRef>
+          <a:fontRef idx="minor">
+            <a:schemeClr val="lt1"/>
+          </a:fontRef>
+        </p:style>
+        <p:txBody>
+          <a:bodyPr rtlCol="0" anchor="ctr"/>
+          <a:lstStyle/>
+          <a:p>
+            <a:pPr algn="ctr"/>
+          </a:p>
+        </p:txBody>
+      </p:sp>
+      <p:sp>
+        <p:nvSpPr>
+          <p:cNvPr id="270" name="Rectangle 269"/>
+          <p:cNvSpPr/>
+          <p:nvPr/>
+        </p:nvSpPr>
+        <p:spPr>
+          <a:xfrm>
+            <a:off x="1847088" y="3584067"/>
+            <a:ext cx="128524" cy="19050"/>
+          </a:xfrm>
+          <a:prstGeom prst="rect">
+            <a:avLst/>
+          </a:prstGeom>
+          <a:solidFill>
+            <a:srgbClr val="4F46E5"/>
+          </a:solidFill>
+          <a:ln>
+            <a:noFill/>
+          </a:ln>
+          <a:effectLst/>
+        </p:spPr>
+        <p:style>
+          <a:lnRef idx="1">
+            <a:schemeClr val="accent1"/>
+          </a:lnRef>
+          <a:fillRef idx="3">
+            <a:schemeClr val="accent1"/>
+          </a:fillRef>
+          <a:effectRef idx="2">
+            <a:schemeClr val="accent1"/>
+          </a:effectRef>
+          <a:fontRef idx="minor">
+            <a:schemeClr val="lt1"/>
+          </a:fontRef>
+        </p:style>
+        <p:txBody>
+          <a:bodyPr rtlCol="0" anchor="ctr"/>
+          <a:lstStyle/>
+          <a:p>
+            <a:pPr algn="ctr"/>
+          </a:p>
+        </p:txBody>
+      </p:sp>
+      <p:sp>
+        <p:nvSpPr>
+          <p:cNvPr id="271" name="Isosceles Triangle 270"/>
+          <p:cNvSpPr/>
+          <p:nvPr/>
+        </p:nvSpPr>
+        <p:spPr>
+          <a:xfrm rot="5400000">
+            <a:off x="1962912" y="3542792"/>
+            <a:ext cx="76200" cy="101600"/>
+          </a:xfrm>
+          <a:prstGeom prst="triangle">
+            <a:avLst/>
+          </a:prstGeom>
+          <a:solidFill>
+            <a:srgbClr val="4F46E5"/>
+          </a:solidFill>
+          <a:ln>
+            <a:noFill/>
+          </a:ln>
+          <a:effectLst/>
+        </p:spPr>
+        <p:style>
+          <a:lnRef idx="1">
+            <a:schemeClr val="accent1"/>
+          </a:lnRef>
+          <a:fillRef idx="3">
+            <a:schemeClr val="accent1"/>
+          </a:fillRef>
+          <a:effectRef idx="2">
+            <a:schemeClr val="accent1"/>
+          </a:effectRef>
+          <a:fontRef idx="minor">
+            <a:schemeClr val="lt1"/>
+          </a:fontRef>
+        </p:style>
+        <p:txBody>
+          <a:bodyPr rtlCol="0" anchor="ctr"/>
+          <a:lstStyle/>
+          <a:p>
+            <a:pPr algn="ctr"/>
+          </a:p>
+        </p:txBody>
+      </p:sp>
+      <p:sp>
+        <p:nvSpPr>
+          <p:cNvPr id="272" name="Rectangle 271"/>
+          <p:cNvSpPr/>
+          <p:nvPr/>
+        </p:nvSpPr>
+        <p:spPr>
+          <a:xfrm>
+            <a:off x="4005072" y="3584067"/>
+            <a:ext cx="988060" cy="19050"/>
+          </a:xfrm>
+          <a:prstGeom prst="rect">
+            <a:avLst/>
+          </a:prstGeom>
+          <a:solidFill>
+            <a:srgbClr val="4F46E5"/>
+          </a:solidFill>
+          <a:ln>
+            <a:noFill/>
+          </a:ln>
+          <a:effectLst/>
+        </p:spPr>
+        <p:style>
+          <a:lnRef idx="1">
+            <a:schemeClr val="accent1"/>
+          </a:lnRef>
+          <a:fillRef idx="3">
+            <a:schemeClr val="accent1"/>
+          </a:fillRef>
+          <a:effectRef idx="2">
+            <a:schemeClr val="accent1"/>
+          </a:effectRef>
+          <a:fontRef idx="minor">
+            <a:schemeClr val="lt1"/>
+          </a:fontRef>
+        </p:style>
+        <p:txBody>
+          <a:bodyPr rtlCol="0" anchor="ctr"/>
+          <a:lstStyle/>
+          <a:p>
+            <a:pPr algn="ctr"/>
+          </a:p>
+        </p:txBody>
+      </p:sp>
+      <p:sp>
+        <p:nvSpPr>
+          <p:cNvPr id="273" name="Isosceles Triangle 272"/>
+          <p:cNvSpPr/>
+          <p:nvPr/>
+        </p:nvSpPr>
+        <p:spPr>
+          <a:xfrm rot="5400000">
+            <a:off x="4980432" y="3542792"/>
+            <a:ext cx="76200" cy="101600"/>
+          </a:xfrm>
+          <a:prstGeom prst="triangle">
+            <a:avLst/>
+          </a:prstGeom>
+          <a:solidFill>
+            <a:srgbClr val="4F46E5"/>
+          </a:solidFill>
+          <a:ln>
+            <a:noFill/>
+          </a:ln>
+          <a:effectLst/>
+        </p:spPr>
+        <p:style>
+          <a:lnRef idx="1">
+            <a:schemeClr val="accent1"/>
+          </a:lnRef>
+          <a:fillRef idx="3">
+            <a:schemeClr val="accent1"/>
+          </a:fillRef>
+          <a:effectRef idx="2">
+            <a:schemeClr val="accent1"/>
+          </a:effectRef>
+          <a:fontRef idx="minor">
+            <a:schemeClr val="lt1"/>
+          </a:fontRef>
+        </p:style>
+        <p:txBody>
+          <a:bodyPr rtlCol="0" anchor="ctr"/>
+          <a:lstStyle/>
+          <a:p>
+            <a:pPr algn="ctr"/>
+          </a:p>
+        </p:txBody>
+      </p:sp>
+      <p:sp>
+        <p:nvSpPr>
+          <p:cNvPr id="274" name="Rectangle 273"/>
+          <p:cNvSpPr/>
+          <p:nvPr/>
+        </p:nvSpPr>
+        <p:spPr>
+          <a:xfrm>
+            <a:off x="7022592" y="3584067"/>
+            <a:ext cx="256539" cy="19050"/>
+          </a:xfrm>
+          <a:prstGeom prst="rect">
+            <a:avLst/>
+          </a:prstGeom>
+          <a:solidFill>
+            <a:srgbClr val="4F46E5"/>
+          </a:solidFill>
+          <a:ln>
+            <a:noFill/>
+          </a:ln>
+          <a:effectLst/>
+        </p:spPr>
+        <p:style>
+          <a:lnRef idx="1">
+            <a:schemeClr val="accent1"/>
+          </a:lnRef>
+          <a:fillRef idx="3">
+            <a:schemeClr val="accent1"/>
+          </a:fillRef>
+          <a:effectRef idx="2">
+            <a:schemeClr val="accent1"/>
+          </a:effectRef>
+          <a:fontRef idx="minor">
+            <a:schemeClr val="lt1"/>
+          </a:fontRef>
+        </p:style>
+        <p:txBody>
+          <a:bodyPr rtlCol="0" anchor="ctr"/>
+          <a:lstStyle/>
+          <a:p>
+            <a:pPr algn="ctr"/>
+          </a:p>
+        </p:txBody>
+      </p:sp>
+      <p:sp>
+        <p:nvSpPr>
+          <p:cNvPr id="275" name="Isosceles Triangle 274"/>
+          <p:cNvSpPr/>
+          <p:nvPr/>
+        </p:nvSpPr>
+        <p:spPr>
+          <a:xfrm rot="5400000">
+            <a:off x="7266431" y="3542792"/>
+            <a:ext cx="76200" cy="101600"/>
+          </a:xfrm>
+          <a:prstGeom prst="triangle">
+            <a:avLst/>
+          </a:prstGeom>
+          <a:solidFill>
+            <a:srgbClr val="4F46E5"/>
+          </a:solidFill>
+          <a:ln>
+            <a:noFill/>
+          </a:ln>
+          <a:effectLst/>
+        </p:spPr>
+        <p:style>
+          <a:lnRef idx="1">
+            <a:schemeClr val="accent1"/>
+          </a:lnRef>
+          <a:fillRef idx="3">
+            <a:schemeClr val="accent1"/>
+          </a:fillRef>
+          <a:effectRef idx="2">
+            <a:schemeClr val="accent1"/>
+          </a:effectRef>
+          <a:fontRef idx="minor">
+            <a:schemeClr val="lt1"/>
+          </a:fontRef>
+        </p:style>
+        <p:txBody>
+          <a:bodyPr rtlCol="0" anchor="ctr"/>
+          <a:lstStyle/>
+          <a:p>
+            <a:pPr algn="ctr"/>
+          </a:p>
+        </p:txBody>
+      </p:sp>
+      <p:sp>
+        <p:nvSpPr>
+          <p:cNvPr id="276" name="Rounded Rectangle 275"/>
+          <p:cNvSpPr/>
+          <p:nvPr/>
+        </p:nvSpPr>
+        <p:spPr>
+          <a:xfrm>
+            <a:off x="384048" y="4206240"/>
+            <a:ext cx="8375904" cy="658368"/>
+          </a:xfrm>
+          <a:prstGeom prst="roundRect">
+            <a:avLst>
+              <a:gd name="adj" fmla="val 4000"/>
+            </a:avLst>
+          </a:prstGeom>
+          <a:solidFill>
+            <a:srgbClr val="EEF0FF"/>
+          </a:solidFill>
+          <a:ln>
+            <a:noFill/>
+          </a:ln>
+          <a:effectLst/>
+        </p:spPr>
+        <p:style>
+          <a:lnRef idx="1">
+            <a:schemeClr val="accent1"/>
+          </a:lnRef>
+          <a:fillRef idx="3">
+            <a:schemeClr val="accent1"/>
+          </a:fillRef>
+          <a:effectRef idx="2">
+            <a:schemeClr val="accent1"/>
+          </a:effectRef>
+          <a:fontRef idx="minor">
+            <a:schemeClr val="lt1"/>
+          </a:fontRef>
+        </p:style>
+        <p:txBody>
+          <a:bodyPr rtlCol="0" anchor="ctr"/>
+          <a:lstStyle/>
+          <a:p>
+            <a:pPr algn="ctr"/>
+          </a:p>
+        </p:txBody>
+      </p:sp>
+      <p:sp>
+        <p:nvSpPr>
+          <p:cNvPr id="277" name="Rounded Rectangle 276"/>
+          <p:cNvSpPr/>
+          <p:nvPr/>
+        </p:nvSpPr>
+        <p:spPr>
+          <a:xfrm>
+            <a:off x="384048" y="1417320"/>
+            <a:ext cx="1417320" cy="713232"/>
+          </a:xfrm>
+          <a:prstGeom prst="roundRect">
+            <a:avLst>
+              <a:gd name="adj" fmla="val 4000"/>
+            </a:avLst>
+          </a:prstGeom>
+          <a:solidFill>
+            <a:srgbClr val="F8FAFC"/>
+          </a:solidFill>
+          <a:ln w="9525">
+            <a:solidFill>
+              <a:srgbClr val="E2E8F0"/>
+            </a:solidFill>
+          </a:ln>
+          <a:effectLst/>
+        </p:spPr>
+        <p:style>
+          <a:lnRef idx="1">
+            <a:schemeClr val="accent1"/>
+          </a:lnRef>
+          <a:fillRef idx="3">
+            <a:schemeClr val="accent1"/>
+          </a:fillRef>
+          <a:effectRef idx="2">
+            <a:schemeClr val="accent1"/>
+          </a:effectRef>
+          <a:fontRef idx="minor">
+            <a:schemeClr val="lt1"/>
+          </a:fontRef>
+        </p:style>
+        <p:txBody>
+          <a:bodyPr rtlCol="0" anchor="ctr"/>
+          <a:lstStyle/>
+          <a:p>
+            <a:pPr algn="ctr"/>
+          </a:p>
+        </p:txBody>
+      </p:sp>
+      <p:sp>
+        <p:nvSpPr>
+          <p:cNvPr id="278" name="TextBox 277"/>
           <p:cNvSpPr txBox="1"/>
           <p:nvPr/>
         </p:nvSpPr>
@@ -26808,7 +29958,7 @@
       </p:sp>
       <p:sp>
         <p:nvSpPr>
-          <p:cNvPr id="224" name="TextBox 223"/>
+          <p:cNvPr id="279" name="TextBox 278"/>
           <p:cNvSpPr txBox="1"/>
           <p:nvPr/>
         </p:nvSpPr>
@@ -26850,7 +30000,7 @@
       </p:sp>
       <p:sp>
         <p:nvSpPr>
-          <p:cNvPr id="225" name="Rounded Rectangle 224"/>
+          <p:cNvPr id="280" name="Rounded Rectangle 279"/>
           <p:cNvSpPr/>
           <p:nvPr/>
         </p:nvSpPr>
@@ -26898,7 +30048,7 @@
       </p:sp>
       <p:sp>
         <p:nvSpPr>
-          <p:cNvPr id="226" name="TextBox 225"/>
+          <p:cNvPr id="281" name="TextBox 280"/>
           <p:cNvSpPr txBox="1"/>
           <p:nvPr/>
         </p:nvSpPr>
@@ -26940,7 +30090,7 @@
       </p:sp>
       <p:sp>
         <p:nvSpPr>
-          <p:cNvPr id="227" name="TextBox 226"/>
+          <p:cNvPr id="282" name="TextBox 281"/>
           <p:cNvSpPr txBox="1"/>
           <p:nvPr/>
         </p:nvSpPr>
@@ -26982,7 +30132,7 @@
       </p:sp>
       <p:sp>
         <p:nvSpPr>
-          <p:cNvPr id="228" name="Rounded Rectangle 227"/>
+          <p:cNvPr id="283" name="Rounded Rectangle 282"/>
           <p:cNvSpPr/>
           <p:nvPr/>
         </p:nvSpPr>
@@ -27030,7 +30180,7 @@
       </p:sp>
       <p:sp>
         <p:nvSpPr>
-          <p:cNvPr id="229" name="TextBox 228"/>
+          <p:cNvPr id="284" name="TextBox 283"/>
           <p:cNvSpPr txBox="1"/>
           <p:nvPr/>
         </p:nvSpPr>
@@ -27072,7 +30222,7 @@
       </p:sp>
       <p:sp>
         <p:nvSpPr>
-          <p:cNvPr id="230" name="TextBox 229"/>
+          <p:cNvPr id="285" name="TextBox 284"/>
           <p:cNvSpPr txBox="1"/>
           <p:nvPr/>
         </p:nvSpPr>
@@ -27114,7 +30264,7 @@
       </p:sp>
       <p:sp>
         <p:nvSpPr>
-          <p:cNvPr id="231" name="Rounded Rectangle 230"/>
+          <p:cNvPr id="286" name="Rounded Rectangle 285"/>
           <p:cNvSpPr/>
           <p:nvPr/>
         </p:nvSpPr>
@@ -27162,7 +30312,7 @@
       </p:sp>
       <p:sp>
         <p:nvSpPr>
-          <p:cNvPr id="232" name="TextBox 231"/>
+          <p:cNvPr id="287" name="TextBox 286"/>
           <p:cNvSpPr txBox="1"/>
           <p:nvPr/>
         </p:nvSpPr>
@@ -27204,7 +30354,7 @@
       </p:sp>
       <p:sp>
         <p:nvSpPr>
-          <p:cNvPr id="233" name="TextBox 232"/>
+          <p:cNvPr id="288" name="TextBox 287"/>
           <p:cNvSpPr txBox="1"/>
           <p:nvPr/>
         </p:nvSpPr>
@@ -27247,7 +30397,7 @@
       </p:sp>
       <p:sp>
         <p:nvSpPr>
-          <p:cNvPr id="234" name="Rounded Rectangle 233"/>
+          <p:cNvPr id="289" name="Rounded Rectangle 288"/>
           <p:cNvSpPr/>
           <p:nvPr/>
         </p:nvSpPr>
@@ -27295,7 +30445,7 @@
       </p:sp>
       <p:sp>
         <p:nvSpPr>
-          <p:cNvPr id="235" name="TextBox 234"/>
+          <p:cNvPr id="290" name="TextBox 289"/>
           <p:cNvSpPr txBox="1"/>
           <p:nvPr/>
         </p:nvSpPr>
@@ -27337,7 +30487,7 @@
       </p:sp>
       <p:sp>
         <p:nvSpPr>
-          <p:cNvPr id="236" name="TextBox 235"/>
+          <p:cNvPr id="291" name="TextBox 290"/>
           <p:cNvSpPr txBox="1"/>
           <p:nvPr/>
         </p:nvSpPr>
@@ -27379,7 +30529,7 @@
       </p:sp>
       <p:sp>
         <p:nvSpPr>
-          <p:cNvPr id="237" name="Rounded Rectangle 236"/>
+          <p:cNvPr id="292" name="Rounded Rectangle 291"/>
           <p:cNvSpPr/>
           <p:nvPr/>
         </p:nvSpPr>
@@ -27427,7 +30577,7 @@
       </p:sp>
       <p:sp>
         <p:nvSpPr>
-          <p:cNvPr id="238" name="TextBox 237"/>
+          <p:cNvPr id="293" name="TextBox 292"/>
           <p:cNvSpPr txBox="1"/>
           <p:nvPr/>
         </p:nvSpPr>
@@ -27469,7 +30619,7 @@
       </p:sp>
       <p:sp>
         <p:nvSpPr>
-          <p:cNvPr id="239" name="TextBox 238"/>
+          <p:cNvPr id="294" name="TextBox 293"/>
           <p:cNvSpPr txBox="1"/>
           <p:nvPr/>
         </p:nvSpPr>
@@ -27511,7 +30661,7 @@
       </p:sp>
       <p:sp>
         <p:nvSpPr>
-          <p:cNvPr id="240" name="Rounded Rectangle 239"/>
+          <p:cNvPr id="295" name="Rounded Rectangle 294"/>
           <p:cNvSpPr/>
           <p:nvPr/>
         </p:nvSpPr>
@@ -27559,7 +30709,7 @@
       </p:sp>
       <p:sp>
         <p:nvSpPr>
-          <p:cNvPr id="241" name="TextBox 240"/>
+          <p:cNvPr id="296" name="TextBox 295"/>
           <p:cNvSpPr txBox="1"/>
           <p:nvPr/>
         </p:nvSpPr>
@@ -27601,7 +30751,7 @@
       </p:sp>
       <p:sp>
         <p:nvSpPr>
-          <p:cNvPr id="242" name="TextBox 241"/>
+          <p:cNvPr id="297" name="TextBox 296"/>
           <p:cNvSpPr txBox="1"/>
           <p:nvPr/>
         </p:nvSpPr>
@@ -27644,7 +30794,7 @@
       </p:sp>
       <p:sp>
         <p:nvSpPr>
-          <p:cNvPr id="243" name="Rounded Rectangle 242"/>
+          <p:cNvPr id="298" name="Rounded Rectangle 297"/>
           <p:cNvSpPr/>
           <p:nvPr/>
         </p:nvSpPr>
@@ -27692,7 +30842,7 @@
       </p:sp>
       <p:sp>
         <p:nvSpPr>
-          <p:cNvPr id="244" name="TextBox 243"/>
+          <p:cNvPr id="299" name="TextBox 298"/>
           <p:cNvSpPr txBox="1"/>
           <p:nvPr/>
         </p:nvSpPr>
@@ -27734,7 +30884,7 @@
       </p:sp>
       <p:sp>
         <p:nvSpPr>
-          <p:cNvPr id="245" name="TextBox 244"/>
+          <p:cNvPr id="300" name="TextBox 299"/>
           <p:cNvSpPr txBox="1"/>
           <p:nvPr/>
         </p:nvSpPr>
@@ -27777,7 +30927,7 @@
       </p:sp>
       <p:sp>
         <p:nvSpPr>
-          <p:cNvPr id="246" name="Rounded Rectangle 245"/>
+          <p:cNvPr id="301" name="Rounded Rectangle 300"/>
           <p:cNvSpPr/>
           <p:nvPr/>
         </p:nvSpPr>
@@ -27825,7 +30975,7 @@
       </p:sp>
       <p:sp>
         <p:nvSpPr>
-          <p:cNvPr id="247" name="TextBox 246"/>
+          <p:cNvPr id="302" name="TextBox 301"/>
           <p:cNvSpPr txBox="1"/>
           <p:nvPr/>
         </p:nvSpPr>
@@ -27867,7 +31017,7 @@
       </p:sp>
       <p:sp>
         <p:nvSpPr>
-          <p:cNvPr id="248" name="TextBox 247"/>
+          <p:cNvPr id="303" name="TextBox 302"/>
           <p:cNvSpPr txBox="1"/>
           <p:nvPr/>
         </p:nvSpPr>
@@ -27910,7 +31060,7 @@
       </p:sp>
       <p:sp>
         <p:nvSpPr>
-          <p:cNvPr id="249" name="Rounded Rectangle 248"/>
+          <p:cNvPr id="304" name="Rounded Rectangle 303"/>
           <p:cNvSpPr/>
           <p:nvPr/>
         </p:nvSpPr>
@@ -27958,7 +31108,7 @@
       </p:sp>
       <p:sp>
         <p:nvSpPr>
-          <p:cNvPr id="250" name="TextBox 249"/>
+          <p:cNvPr id="305" name="TextBox 304"/>
           <p:cNvSpPr txBox="1"/>
           <p:nvPr/>
         </p:nvSpPr>
@@ -28000,7 +31150,7 @@
       </p:sp>
       <p:sp>
         <p:nvSpPr>
-          <p:cNvPr id="251" name="TextBox 250"/>
+          <p:cNvPr id="306" name="TextBox 305"/>
           <p:cNvSpPr txBox="1"/>
           <p:nvPr/>
         </p:nvSpPr>
@@ -28043,7 +31193,7 @@
       </p:sp>
       <p:sp>
         <p:nvSpPr>
-          <p:cNvPr id="252" name="Rounded Rectangle 251"/>
+          <p:cNvPr id="307" name="Rounded Rectangle 306"/>
           <p:cNvSpPr/>
           <p:nvPr/>
         </p:nvSpPr>
@@ -28091,7 +31241,7 @@
       </p:sp>
       <p:sp>
         <p:nvSpPr>
-          <p:cNvPr id="253" name="TextBox 252"/>
+          <p:cNvPr id="308" name="TextBox 307"/>
           <p:cNvSpPr txBox="1"/>
           <p:nvPr/>
         </p:nvSpPr>
@@ -28133,7 +31283,7 @@
       </p:sp>
       <p:sp>
         <p:nvSpPr>
-          <p:cNvPr id="254" name="TextBox 253"/>
+          <p:cNvPr id="309" name="TextBox 308"/>
           <p:cNvSpPr txBox="1"/>
           <p:nvPr/>
         </p:nvSpPr>
@@ -28176,7 +31326,7 @@
       </p:sp>
       <p:sp>
         <p:nvSpPr>
-          <p:cNvPr id="255" name="Rounded Rectangle 254"/>
+          <p:cNvPr id="310" name="Rounded Rectangle 309"/>
           <p:cNvSpPr/>
           <p:nvPr/>
         </p:nvSpPr>
@@ -28224,7 +31374,7 @@
       </p:sp>
       <p:sp>
         <p:nvSpPr>
-          <p:cNvPr id="256" name="TextBox 255"/>
+          <p:cNvPr id="311" name="TextBox 310"/>
           <p:cNvSpPr txBox="1"/>
           <p:nvPr/>
         </p:nvSpPr>
@@ -28266,7 +31416,7 @@
       </p:sp>
       <p:sp>
         <p:nvSpPr>
-          <p:cNvPr id="257" name="TextBox 256"/>
+          <p:cNvPr id="312" name="TextBox 311"/>
           <p:cNvSpPr txBox="1"/>
           <p:nvPr/>
         </p:nvSpPr>
@@ -28309,7 +31459,7 @@
       </p:sp>
       <p:sp>
         <p:nvSpPr>
-          <p:cNvPr id="258" name="Rectangle 257"/>
+          <p:cNvPr id="313" name="Rectangle 312"/>
           <p:cNvSpPr/>
           <p:nvPr/>
         </p:nvSpPr>
@@ -28353,7 +31503,7 @@
       </p:sp>
       <p:sp>
         <p:nvSpPr>
-          <p:cNvPr id="259" name="Isosceles Triangle 258"/>
+          <p:cNvPr id="314" name="Isosceles Triangle 313"/>
           <p:cNvSpPr/>
           <p:nvPr/>
         </p:nvSpPr>
@@ -28397,7 +31547,7 @@
       </p:sp>
       <p:sp>
         <p:nvSpPr>
-          <p:cNvPr id="260" name="Rectangle 259"/>
+          <p:cNvPr id="315" name="Rectangle 314"/>
           <p:cNvSpPr/>
           <p:nvPr/>
         </p:nvSpPr>
@@ -28441,7 +31591,7 @@
       </p:sp>
       <p:sp>
         <p:nvSpPr>
-          <p:cNvPr id="261" name="Isosceles Triangle 260"/>
+          <p:cNvPr id="316" name="Isosceles Triangle 315"/>
           <p:cNvSpPr/>
           <p:nvPr/>
         </p:nvSpPr>
@@ -28485,7 +31635,7 @@
       </p:sp>
       <p:sp>
         <p:nvSpPr>
-          <p:cNvPr id="262" name="Rectangle 261"/>
+          <p:cNvPr id="317" name="Rectangle 316"/>
           <p:cNvSpPr/>
           <p:nvPr/>
         </p:nvSpPr>
@@ -28529,7 +31679,7 @@
       </p:sp>
       <p:sp>
         <p:nvSpPr>
-          <p:cNvPr id="263" name="Isosceles Triangle 262"/>
+          <p:cNvPr id="318" name="Isosceles Triangle 317"/>
           <p:cNvSpPr/>
           <p:nvPr/>
         </p:nvSpPr>
@@ -28573,7 +31723,7 @@
       </p:sp>
       <p:sp>
         <p:nvSpPr>
-          <p:cNvPr id="264" name="Rectangle 263"/>
+          <p:cNvPr id="319" name="Rectangle 318"/>
           <p:cNvSpPr/>
           <p:nvPr/>
         </p:nvSpPr>
@@ -28617,7 +31767,7 @@
       </p:sp>
       <p:sp>
         <p:nvSpPr>
-          <p:cNvPr id="265" name="Isosceles Triangle 264"/>
+          <p:cNvPr id="320" name="Isosceles Triangle 319"/>
           <p:cNvSpPr/>
           <p:nvPr/>
         </p:nvSpPr>
@@ -28661,7 +31811,7 @@
       </p:sp>
       <p:sp>
         <p:nvSpPr>
-          <p:cNvPr id="266" name="Rectangle 265"/>
+          <p:cNvPr id="321" name="Rectangle 320"/>
           <p:cNvSpPr/>
           <p:nvPr/>
         </p:nvSpPr>
@@ -28705,7 +31855,7 @@
       </p:sp>
       <p:sp>
         <p:nvSpPr>
-          <p:cNvPr id="267" name="Isosceles Triangle 266"/>
+          <p:cNvPr id="322" name="Isosceles Triangle 321"/>
           <p:cNvSpPr/>
           <p:nvPr/>
         </p:nvSpPr>
@@ -28749,7 +31899,7 @@
       </p:sp>
       <p:sp>
         <p:nvSpPr>
-          <p:cNvPr id="268" name="Rectangle 267"/>
+          <p:cNvPr id="323" name="Rectangle 322"/>
           <p:cNvSpPr/>
           <p:nvPr/>
         </p:nvSpPr>
@@ -28793,7 +31943,7 @@
       </p:sp>
       <p:sp>
         <p:nvSpPr>
-          <p:cNvPr id="269" name="Isosceles Triangle 268"/>
+          <p:cNvPr id="324" name="Isosceles Triangle 323"/>
           <p:cNvSpPr/>
           <p:nvPr/>
         </p:nvSpPr>
@@ -28837,7 +31987,7 @@
       </p:sp>
       <p:sp>
         <p:nvSpPr>
-          <p:cNvPr id="270" name="Rectangle 269"/>
+          <p:cNvPr id="325" name="Rectangle 324"/>
           <p:cNvSpPr/>
           <p:nvPr/>
         </p:nvSpPr>
@@ -28881,7 +32031,7 @@
       </p:sp>
       <p:sp>
         <p:nvSpPr>
-          <p:cNvPr id="271" name="Isosceles Triangle 270"/>
+          <p:cNvPr id="326" name="Isosceles Triangle 325"/>
           <p:cNvSpPr/>
           <p:nvPr/>
         </p:nvSpPr>
@@ -28925,7 +32075,7 @@
       </p:sp>
       <p:sp>
         <p:nvSpPr>
-          <p:cNvPr id="272" name="Rectangle 271"/>
+          <p:cNvPr id="327" name="Rectangle 326"/>
           <p:cNvSpPr/>
           <p:nvPr/>
         </p:nvSpPr>
@@ -28969,7 +32119,7 @@
       </p:sp>
       <p:sp>
         <p:nvSpPr>
-          <p:cNvPr id="273" name="Isosceles Triangle 272"/>
+          <p:cNvPr id="328" name="Isosceles Triangle 327"/>
           <p:cNvSpPr/>
           <p:nvPr/>
         </p:nvSpPr>
@@ -29013,7 +32163,7 @@
       </p:sp>
       <p:sp>
         <p:nvSpPr>
-          <p:cNvPr id="274" name="Rectangle 273"/>
+          <p:cNvPr id="329" name="Rectangle 328"/>
           <p:cNvSpPr/>
           <p:nvPr/>
         </p:nvSpPr>
@@ -29057,7 +32207,7 @@
       </p:sp>
       <p:sp>
         <p:nvSpPr>
-          <p:cNvPr id="275" name="Isosceles Triangle 274"/>
+          <p:cNvPr id="330" name="Isosceles Triangle 329"/>
           <p:cNvSpPr/>
           <p:nvPr/>
         </p:nvSpPr>
@@ -29101,7 +32251,7 @@
       </p:sp>
       <p:sp>
         <p:nvSpPr>
-          <p:cNvPr id="276" name="Rounded Rectangle 275"/>
+          <p:cNvPr id="331" name="Rounded Rectangle 330"/>
           <p:cNvSpPr/>
           <p:nvPr/>
         </p:nvSpPr>
@@ -29147,7 +32297,7 @@
       </p:sp>
       <p:sp>
         <p:nvSpPr>
-          <p:cNvPr id="277" name="TextBox 276"/>
+          <p:cNvPr id="332" name="TextBox 331"/>
           <p:cNvSpPr txBox="1"/>
           <p:nvPr/>
         </p:nvSpPr>
@@ -29766,7 +32916,199 @@
       </p:sp>
       <p:sp>
         <p:nvSpPr>
-          <p:cNvPr id="141" name="TextBox 140"/>
+          <p:cNvPr id="143" name="Rounded Rectangle 142"/>
+          <p:cNvSpPr/>
+          <p:nvPr/>
+        </p:nvSpPr>
+        <p:spPr>
+          <a:xfrm>
+            <a:off x="2505456" y="1298448"/>
+            <a:ext cx="1993392" cy="2331720"/>
+          </a:xfrm>
+          <a:prstGeom prst="roundRect">
+            <a:avLst>
+              <a:gd name="adj" fmla="val 4000"/>
+            </a:avLst>
+          </a:prstGeom>
+          <a:solidFill>
+            <a:srgbClr val="F8FAFC"/>
+          </a:solidFill>
+          <a:ln w="9525">
+            <a:solidFill>
+              <a:srgbClr val="E2E8F0"/>
+            </a:solidFill>
+          </a:ln>
+          <a:effectLst/>
+        </p:spPr>
+        <p:style>
+          <a:lnRef idx="1">
+            <a:schemeClr val="accent1"/>
+          </a:lnRef>
+          <a:fillRef idx="3">
+            <a:schemeClr val="accent1"/>
+          </a:fillRef>
+          <a:effectRef idx="2">
+            <a:schemeClr val="accent1"/>
+          </a:effectRef>
+          <a:fontRef idx="minor">
+            <a:schemeClr val="lt1"/>
+          </a:fontRef>
+        </p:style>
+        <p:txBody>
+          <a:bodyPr rtlCol="0" anchor="ctr"/>
+          <a:lstStyle/>
+          <a:p>
+            <a:pPr algn="ctr"/>
+          </a:p>
+        </p:txBody>
+      </p:sp>
+      <p:sp>
+        <p:nvSpPr>
+          <p:cNvPr id="146" name="Rounded Rectangle 145"/>
+          <p:cNvSpPr/>
+          <p:nvPr/>
+        </p:nvSpPr>
+        <p:spPr>
+          <a:xfrm>
+            <a:off x="4626864" y="1298448"/>
+            <a:ext cx="1993392" cy="2331720"/>
+          </a:xfrm>
+          <a:prstGeom prst="roundRect">
+            <a:avLst>
+              <a:gd name="adj" fmla="val 4000"/>
+            </a:avLst>
+          </a:prstGeom>
+          <a:solidFill>
+            <a:srgbClr val="F8FAFC"/>
+          </a:solidFill>
+          <a:ln w="9525">
+            <a:solidFill>
+              <a:srgbClr val="E2E8F0"/>
+            </a:solidFill>
+          </a:ln>
+          <a:effectLst/>
+        </p:spPr>
+        <p:style>
+          <a:lnRef idx="1">
+            <a:schemeClr val="accent1"/>
+          </a:lnRef>
+          <a:fillRef idx="3">
+            <a:schemeClr val="accent1"/>
+          </a:fillRef>
+          <a:effectRef idx="2">
+            <a:schemeClr val="accent1"/>
+          </a:effectRef>
+          <a:fontRef idx="minor">
+            <a:schemeClr val="lt1"/>
+          </a:fontRef>
+        </p:style>
+        <p:txBody>
+          <a:bodyPr rtlCol="0" anchor="ctr"/>
+          <a:lstStyle/>
+          <a:p>
+            <a:pPr algn="ctr"/>
+          </a:p>
+        </p:txBody>
+      </p:sp>
+      <p:sp>
+        <p:nvSpPr>
+          <p:cNvPr id="149" name="Rounded Rectangle 148"/>
+          <p:cNvSpPr/>
+          <p:nvPr/>
+        </p:nvSpPr>
+        <p:spPr>
+          <a:xfrm>
+            <a:off x="6748272" y="1298448"/>
+            <a:ext cx="1993392" cy="2331720"/>
+          </a:xfrm>
+          <a:prstGeom prst="roundRect">
+            <a:avLst>
+              <a:gd name="adj" fmla="val 4000"/>
+            </a:avLst>
+          </a:prstGeom>
+          <a:solidFill>
+            <a:srgbClr val="F8FAFC"/>
+          </a:solidFill>
+          <a:ln w="9525">
+            <a:solidFill>
+              <a:srgbClr val="E2E8F0"/>
+            </a:solidFill>
+          </a:ln>
+          <a:effectLst/>
+        </p:spPr>
+        <p:style>
+          <a:lnRef idx="1">
+            <a:schemeClr val="accent1"/>
+          </a:lnRef>
+          <a:fillRef idx="3">
+            <a:schemeClr val="accent1"/>
+          </a:fillRef>
+          <a:effectRef idx="2">
+            <a:schemeClr val="accent1"/>
+          </a:effectRef>
+          <a:fontRef idx="minor">
+            <a:schemeClr val="lt1"/>
+          </a:fontRef>
+        </p:style>
+        <p:txBody>
+          <a:bodyPr rtlCol="0" anchor="ctr"/>
+          <a:lstStyle/>
+          <a:p>
+            <a:pPr algn="ctr"/>
+          </a:p>
+        </p:txBody>
+      </p:sp>
+      <p:sp>
+        <p:nvSpPr>
+          <p:cNvPr id="150" name="Rounded Rectangle 149"/>
+          <p:cNvSpPr/>
+          <p:nvPr/>
+        </p:nvSpPr>
+        <p:spPr>
+          <a:xfrm>
+            <a:off x="384048" y="1298448"/>
+            <a:ext cx="1993392" cy="2331720"/>
+          </a:xfrm>
+          <a:prstGeom prst="roundRect">
+            <a:avLst>
+              <a:gd name="adj" fmla="val 4000"/>
+            </a:avLst>
+          </a:prstGeom>
+          <a:solidFill>
+            <a:srgbClr val="F8FAFC"/>
+          </a:solidFill>
+          <a:ln w="9525">
+            <a:solidFill>
+              <a:srgbClr val="E2E8F0"/>
+            </a:solidFill>
+          </a:ln>
+          <a:effectLst/>
+        </p:spPr>
+        <p:style>
+          <a:lnRef idx="1">
+            <a:schemeClr val="accent1"/>
+          </a:lnRef>
+          <a:fillRef idx="3">
+            <a:schemeClr val="accent1"/>
+          </a:fillRef>
+          <a:effectRef idx="2">
+            <a:schemeClr val="accent1"/>
+          </a:effectRef>
+          <a:fontRef idx="minor">
+            <a:schemeClr val="lt1"/>
+          </a:fontRef>
+        </p:style>
+        <p:txBody>
+          <a:bodyPr rtlCol="0" anchor="ctr"/>
+          <a:lstStyle/>
+          <a:p>
+            <a:pPr algn="ctr"/>
+          </a:p>
+        </p:txBody>
+      </p:sp>
+      <p:sp>
+        <p:nvSpPr>
+          <p:cNvPr id="151" name="TextBox 150"/>
           <p:cNvSpPr txBox="1"/>
           <p:nvPr/>
         </p:nvSpPr>
@@ -29808,7 +33150,7 @@
       </p:sp>
       <p:sp>
         <p:nvSpPr>
-          <p:cNvPr id="142" name="TextBox 141"/>
+          <p:cNvPr id="152" name="TextBox 151"/>
           <p:cNvSpPr txBox="1"/>
           <p:nvPr/>
         </p:nvSpPr>
@@ -29983,7 +33325,7 @@
       </p:sp>
       <p:sp>
         <p:nvSpPr>
-          <p:cNvPr id="143" name="Rounded Rectangle 142"/>
+          <p:cNvPr id="153" name="Rounded Rectangle 152"/>
           <p:cNvSpPr/>
           <p:nvPr/>
         </p:nvSpPr>
@@ -30031,7 +33373,7 @@
       </p:sp>
       <p:sp>
         <p:nvSpPr>
-          <p:cNvPr id="144" name="TextBox 143"/>
+          <p:cNvPr id="154" name="TextBox 153"/>
           <p:cNvSpPr txBox="1"/>
           <p:nvPr/>
         </p:nvSpPr>
@@ -30073,7 +33415,7 @@
       </p:sp>
       <p:sp>
         <p:nvSpPr>
-          <p:cNvPr id="145" name="TextBox 144"/>
+          <p:cNvPr id="155" name="TextBox 154"/>
           <p:cNvSpPr txBox="1"/>
           <p:nvPr/>
         </p:nvSpPr>
@@ -30210,7 +33552,7 @@
       </p:sp>
       <p:sp>
         <p:nvSpPr>
-          <p:cNvPr id="146" name="Rounded Rectangle 145"/>
+          <p:cNvPr id="156" name="Rounded Rectangle 155"/>
           <p:cNvSpPr/>
           <p:nvPr/>
         </p:nvSpPr>
@@ -30258,7 +33600,7 @@
       </p:sp>
       <p:sp>
         <p:nvSpPr>
-          <p:cNvPr id="147" name="TextBox 146"/>
+          <p:cNvPr id="157" name="TextBox 156"/>
           <p:cNvSpPr txBox="1"/>
           <p:nvPr/>
         </p:nvSpPr>
@@ -30300,7 +33642,7 @@
       </p:sp>
       <p:sp>
         <p:nvSpPr>
-          <p:cNvPr id="148" name="TextBox 147"/>
+          <p:cNvPr id="158" name="TextBox 157"/>
           <p:cNvSpPr txBox="1"/>
           <p:nvPr/>
         </p:nvSpPr>
@@ -30418,7 +33760,7 @@
       </p:sp>
       <p:sp>
         <p:nvSpPr>
-          <p:cNvPr id="149" name="Rounded Rectangle 148"/>
+          <p:cNvPr id="159" name="Rounded Rectangle 158"/>
           <p:cNvSpPr/>
           <p:nvPr/>
         </p:nvSpPr>
@@ -30466,7 +33808,7 @@
       </p:sp>
       <p:sp>
         <p:nvSpPr>
-          <p:cNvPr id="150" name="TextBox 149"/>
+          <p:cNvPr id="160" name="TextBox 159"/>
           <p:cNvSpPr txBox="1"/>
           <p:nvPr/>
         </p:nvSpPr>
@@ -30508,7 +33850,7 @@
       </p:sp>
       <p:sp>
         <p:nvSpPr>
-          <p:cNvPr id="151" name="TextBox 150"/>
+          <p:cNvPr id="161" name="TextBox 160"/>
           <p:cNvSpPr txBox="1"/>
           <p:nvPr/>
         </p:nvSpPr>
@@ -30607,7 +33949,7 @@
       </p:sp>
       <p:sp>
         <p:nvSpPr>
-          <p:cNvPr id="152" name="TextBox 151"/>
+          <p:cNvPr id="162" name="TextBox 161"/>
           <p:cNvSpPr txBox="1"/>
           <p:nvPr/>
         </p:nvSpPr>
@@ -30658,7 +34000,7 @@
       </p:sp>
       <p:sp>
         <p:nvSpPr>
-          <p:cNvPr id="153" name="TextBox 152"/>
+          <p:cNvPr id="163" name="TextBox 162"/>
           <p:cNvSpPr txBox="1"/>
           <p:nvPr/>
         </p:nvSpPr>
